--- a/Microservices/07.2. Load Balancing.pptx
+++ b/Microservices/07.2. Load Balancing.pptx
@@ -5,7 +5,7 @@
     <p:sldMasterId id="2147483708" r:id="rId1"/>
   </p:sldMasterIdLst>
   <p:notesMasterIdLst>
-    <p:notesMasterId r:id="rId50"/>
+    <p:notesMasterId r:id="rId52"/>
   </p:notesMasterIdLst>
   <p:sldIdLst>
     <p:sldId id="670" r:id="rId2"/>
@@ -55,7 +55,9 @@
     <p:sldId id="723" r:id="rId46"/>
     <p:sldId id="724" r:id="rId47"/>
     <p:sldId id="725" r:id="rId48"/>
-    <p:sldId id="516" r:id="rId49"/>
+    <p:sldId id="726" r:id="rId49"/>
+    <p:sldId id="727" r:id="rId50"/>
+    <p:sldId id="516" r:id="rId51"/>
   </p:sldIdLst>
   <p:sldSz cx="9144000" cy="6858000" type="screen4x3"/>
   <p:notesSz cx="6858000" cy="9144000"/>
@@ -270,7 +272,7 @@
             <a:fld id="{2F0940CE-BE1D-4C40-AF8B-3898A4D1F5EC}" type="datetimeFigureOut">
               <a:rPr lang="en-US" smtClean="0"/>
               <a:pPr/>
-              <a:t>3/1/2026</a:t>
+              <a:t>8/6/2026</a:t>
             </a:fld>
             <a:endParaRPr lang="en-US"/>
           </a:p>
@@ -809,7 +811,7 @@
               <a:pPr>
                 <a:defRPr/>
               </a:pPr>
-              <a:t>3/1/2026</a:t>
+              <a:t>8/6/2026</a:t>
             </a:fld>
             <a:endParaRPr lang="en-US"/>
           </a:p>
@@ -1001,7 +1003,7 @@
               <a:pPr>
                 <a:defRPr/>
               </a:pPr>
-              <a:t>3/1/2026</a:t>
+              <a:t>8/6/2026</a:t>
             </a:fld>
             <a:endParaRPr lang="en-US"/>
           </a:p>
@@ -1203,7 +1205,7 @@
               <a:pPr>
                 <a:defRPr/>
               </a:pPr>
-              <a:t>3/1/2026</a:t>
+              <a:t>8/6/2026</a:t>
             </a:fld>
             <a:endParaRPr lang="en-US"/>
           </a:p>
@@ -1395,7 +1397,7 @@
               <a:pPr>
                 <a:defRPr/>
               </a:pPr>
-              <a:t>3/1/2026</a:t>
+              <a:t>8/6/2026</a:t>
             </a:fld>
             <a:endParaRPr lang="en-US"/>
           </a:p>
@@ -1663,7 +1665,7 @@
               <a:pPr>
                 <a:defRPr/>
               </a:pPr>
-              <a:t>3/1/2026</a:t>
+              <a:t>8/6/2026</a:t>
             </a:fld>
             <a:endParaRPr lang="en-US"/>
           </a:p>
@@ -1973,7 +1975,7 @@
               <a:pPr>
                 <a:defRPr/>
               </a:pPr>
-              <a:t>3/1/2026</a:t>
+              <a:t>8/6/2026</a:t>
             </a:fld>
             <a:endParaRPr lang="en-US"/>
           </a:p>
@@ -2417,7 +2419,7 @@
               <a:pPr>
                 <a:defRPr/>
               </a:pPr>
-              <a:t>3/1/2026</a:t>
+              <a:t>8/6/2026</a:t>
             </a:fld>
             <a:endParaRPr lang="en-US"/>
           </a:p>
@@ -2557,7 +2559,7 @@
               <a:pPr>
                 <a:defRPr/>
               </a:pPr>
-              <a:t>3/1/2026</a:t>
+              <a:t>8/6/2026</a:t>
             </a:fld>
             <a:endParaRPr lang="en-US"/>
           </a:p>
@@ -2674,7 +2676,7 @@
               <a:pPr>
                 <a:defRPr/>
               </a:pPr>
-              <a:t>3/1/2026</a:t>
+              <a:t>8/6/2026</a:t>
             </a:fld>
             <a:endParaRPr lang="en-US"/>
           </a:p>
@@ -2973,7 +2975,7 @@
               <a:pPr>
                 <a:defRPr/>
               </a:pPr>
-              <a:t>3/1/2026</a:t>
+              <a:t>8/6/2026</a:t>
             </a:fld>
             <a:endParaRPr lang="en-US"/>
           </a:p>
@@ -3251,7 +3253,7 @@
               <a:pPr>
                 <a:defRPr/>
               </a:pPr>
-              <a:t>3/1/2026</a:t>
+              <a:t>8/6/2026</a:t>
             </a:fld>
             <a:endParaRPr lang="en-US"/>
           </a:p>
@@ -3499,7 +3501,7 @@
               <a:pPr>
                 <a:defRPr/>
               </a:pPr>
-              <a:t>3/1/2026</a:t>
+              <a:t>8/6/2026</a:t>
             </a:fld>
             <a:endParaRPr lang="en-US"/>
           </a:p>
@@ -10265,11 +10267,7 @@
             </a:r>
             <a:r>
               <a:rPr lang="en-US" sz="2400" dirty="0" smtClean="0"/>
-              <a:t> et al. (1999). Dynamic Load Balancing on Web-Server Systems</a:t>
-            </a:r>
-            <a:r>
-              <a:rPr lang="en-US" sz="2400" dirty="0" smtClean="0"/>
-              <a:t>.</a:t>
+              <a:t> et al. (1999). Dynamic Load Balancing on Web-Server Systems.</a:t>
             </a:r>
           </a:p>
           <a:p>
@@ -10295,13 +10293,8 @@
             </a:r>
             <a:r>
               <a:rPr lang="en-US" sz="2400" dirty="0" smtClean="0"/>
-              <a:t> (2013). The Tail at </a:t>
-            </a:r>
-            <a:r>
-              <a:rPr lang="en-US" sz="2400" dirty="0" smtClean="0"/>
-              <a:t>Scale.</a:t>
-            </a:r>
-            <a:endParaRPr lang="en-US" sz="2400" dirty="0" smtClean="0"/>
+              <a:t> (2013). The Tail at Scale.</a:t>
+            </a:r>
           </a:p>
         </p:txBody>
       </p:sp>
@@ -10972,11 +10965,7 @@
             </a:pPr>
             <a:r>
               <a:rPr lang="en-US" sz="2400" dirty="0" smtClean="0"/>
-              <a:t>	</a:t>
-            </a:r>
-            <a:r>
-              <a:rPr lang="en-US" sz="2400" dirty="0" smtClean="0"/>
-              <a:t>Each </a:t>
+              <a:t>	Each </a:t>
             </a:r>
             <a:r>
               <a:rPr lang="en-US" sz="2400" dirty="0" err="1" smtClean="0"/>
@@ -10993,11 +10982,7 @@
             </a:pPr>
             <a:r>
               <a:rPr lang="en-US" sz="2400" dirty="0" smtClean="0"/>
-              <a:t>	A </a:t>
-            </a:r>
-            <a:r>
-              <a:rPr lang="en-US" sz="2400" dirty="0" smtClean="0"/>
-              <a:t>page requires 100 parallel </a:t>
+              <a:t>	A page requires 100 parallel </a:t>
             </a:r>
             <a:r>
               <a:rPr lang="en-US" sz="2400" dirty="0" err="1" smtClean="0"/>
@@ -11017,11 +11002,7 @@
             </a:pPr>
             <a:r>
               <a:rPr lang="en-US" sz="2400" dirty="0" smtClean="0"/>
-              <a:t>	P(at</a:t>
-            </a:r>
-            <a:r>
-              <a:rPr lang="en-US" sz="2400" dirty="0" smtClean="0"/>
-              <a:t> least one slow)≈1−(0.99)</a:t>
+              <a:t>	P(at least one slow)≈1−(0.99)</a:t>
             </a:r>
             <a:r>
               <a:rPr lang="en-US" sz="2400" baseline="30000" dirty="0" smtClean="0"/>
@@ -11121,11 +11102,7 @@
             </a:pPr>
             <a:r>
               <a:rPr lang="en-US" sz="2400" dirty="0" smtClean="0"/>
-              <a:t>	"</a:t>
-            </a:r>
-            <a:r>
-              <a:rPr lang="en-US" sz="2400" dirty="0" smtClean="0"/>
-              <a:t>What is the average latency?"</a:t>
+              <a:t>	"What is the average latency?"</a:t>
             </a:r>
           </a:p>
           <a:p>
@@ -11140,11 +11117,7 @@
             </a:pPr>
             <a:r>
               <a:rPr lang="en-US" sz="2400" dirty="0" smtClean="0"/>
-              <a:t>	"</a:t>
-            </a:r>
-            <a:r>
-              <a:rPr lang="en-US" sz="2400" dirty="0" smtClean="0"/>
-              <a:t>How slow are the slowest 1% (or 0.1%) of requests?"</a:t>
+              <a:t>	"How slow are the slowest 1% (or 0.1%) of requests?"</a:t>
             </a:r>
           </a:p>
           <a:p>
@@ -11191,11 +11164,7 @@
             </a:r>
             <a:r>
               <a:rPr lang="en-US" sz="2400" dirty="0" err="1" smtClean="0"/>
-              <a:t>T</a:t>
-            </a:r>
-            <a:r>
-              <a:rPr lang="en-US" sz="2400" dirty="0" err="1" smtClean="0"/>
-              <a:t>≤t</a:t>
+              <a:t>T≤t</a:t>
             </a:r>
             <a:r>
               <a:rPr lang="en-US" sz="2400" baseline="-25000" dirty="0" err="1" smtClean="0"/>
@@ -11212,11 +11181,7 @@
             </a:pPr>
             <a:r>
               <a:rPr lang="en-US" sz="2400" b="1" dirty="0" smtClean="0"/>
-              <a:t>	p99 </a:t>
-            </a:r>
-            <a:r>
-              <a:rPr lang="en-US" sz="2400" b="1" dirty="0" smtClean="0"/>
-              <a:t>latency</a:t>
+              <a:t>	p99 latency</a:t>
             </a:r>
             <a:r>
               <a:rPr lang="en-US" sz="2400" dirty="0" smtClean="0"/>
@@ -11229,11 +11194,7 @@
             </a:pPr>
             <a:r>
               <a:rPr lang="en-US" sz="2400" b="1" dirty="0" smtClean="0"/>
-              <a:t>	p99.9 </a:t>
-            </a:r>
-            <a:r>
-              <a:rPr lang="en-US" sz="2400" b="1" dirty="0" smtClean="0"/>
-              <a:t>latency</a:t>
+              <a:t>	p99.9 latency</a:t>
             </a:r>
             <a:r>
               <a:rPr lang="en-US" sz="2400" dirty="0" smtClean="0"/>
@@ -11263,11 +11224,7 @@
             </a:r>
             <a:r>
               <a:rPr lang="en-US" sz="2400" b="1" dirty="0" smtClean="0"/>
-              <a:t>right-tail latency</a:t>
-            </a:r>
-            <a:r>
-              <a:rPr lang="en-US" sz="2400" b="1" dirty="0" smtClean="0"/>
-              <a:t>.</a:t>
+              <a:t>right-tail latency.</a:t>
             </a:r>
             <a:endParaRPr lang="en-US" sz="2400" dirty="0" smtClean="0"/>
           </a:p>
@@ -11350,23 +11307,7 @@
             </a:r>
             <a:r>
               <a:rPr lang="en-US" sz="2400" dirty="0" smtClean="0"/>
-              <a:t>. A simple way </a:t>
-            </a:r>
-            <a:r>
-              <a:rPr lang="en-US" sz="2400" dirty="0" smtClean="0"/>
-              <a:t>to curb </a:t>
-            </a:r>
-            <a:r>
-              <a:rPr lang="en-US" sz="2400" dirty="0" smtClean="0"/>
-              <a:t>latency variability is to issue </a:t>
-            </a:r>
-            <a:r>
-              <a:rPr lang="en-US" sz="2400" dirty="0" smtClean="0"/>
-              <a:t>the same </a:t>
-            </a:r>
-            <a:r>
-              <a:rPr lang="en-US" sz="2400" dirty="0" smtClean="0"/>
-              <a:t>request to </a:t>
+              <a:t>. A simple way to curb latency variability is to issue the same request to </a:t>
             </a:r>
             <a:r>
               <a:rPr lang="en-US" sz="2400" u="sng" dirty="0" smtClean="0"/>
@@ -11374,19 +11315,7 @@
             </a:r>
             <a:r>
               <a:rPr lang="en-US" sz="2400" dirty="0" smtClean="0"/>
-              <a:t> </a:t>
-            </a:r>
-            <a:r>
-              <a:rPr lang="en-US" sz="2400" dirty="0" smtClean="0"/>
-              <a:t>and use </a:t>
-            </a:r>
-            <a:r>
-              <a:rPr lang="en-US" sz="2400" dirty="0" smtClean="0"/>
-              <a:t>the results from whichever </a:t>
-            </a:r>
-            <a:r>
-              <a:rPr lang="en-US" sz="2400" dirty="0" smtClean="0"/>
-              <a:t>replica responds </a:t>
+              <a:t> and use the results from whichever replica responds </a:t>
             </a:r>
             <a:r>
               <a:rPr lang="en-US" sz="2400" u="sng" dirty="0" smtClean="0"/>
@@ -11432,29 +11361,21 @@
             </a:r>
             <a:r>
               <a:rPr lang="en-US" sz="2400" dirty="0" smtClean="0"/>
-              <a:t> to particular machines</a:t>
+              <a:t> to particular machines.</a:t>
+            </a:r>
+          </a:p>
+          <a:p>
+            <a:r>
+              <a:rPr lang="en-US" sz="2400" i="1" dirty="0" smtClean="0">
+                <a:solidFill>
+                  <a:srgbClr val="C00000"/>
+                </a:solidFill>
+              </a:rPr>
+              <a:t>Selective replication</a:t>
             </a:r>
             <a:r>
               <a:rPr lang="en-US" sz="2400" dirty="0" smtClean="0"/>
-              <a:t>.</a:t>
-            </a:r>
-          </a:p>
-          <a:p>
-            <a:r>
-              <a:rPr lang="en-US" sz="2400" i="1" dirty="0" smtClean="0">
-                <a:solidFill>
-                  <a:srgbClr val="C00000"/>
-                </a:solidFill>
-              </a:rPr>
-              <a:t>Selective replication</a:t>
-            </a:r>
-            <a:r>
-              <a:rPr lang="en-US" sz="2400" dirty="0" smtClean="0"/>
-              <a:t>. An enhancement of the micro-partitioning scheme is to detect or even predict certain items that are likely to cause load imbalance and create additional replicas of these items</a:t>
-            </a:r>
-            <a:r>
-              <a:rPr lang="en-US" sz="2400" dirty="0" smtClean="0"/>
-              <a:t>.</a:t>
+              <a:t>. An enhancement of the micro-partitioning scheme is to detect or even predict certain items that are likely to cause load imbalance and create additional replicas of these items.</a:t>
             </a:r>
           </a:p>
         </p:txBody>
@@ -11484,38 +11405,13 @@
           <a:chExt cx="0" cy="0"/>
         </a:xfrm>
       </p:grpSpPr>
-      <p:sp>
-        <p:nvSpPr>
-          <p:cNvPr id="18434" name="Title 1"/>
-          <p:cNvSpPr>
-            <a:spLocks noGrp="1"/>
-          </p:cNvSpPr>
-          <p:nvPr>
-            <p:ph type="title"/>
-          </p:nvPr>
-        </p:nvSpPr>
-        <p:spPr/>
-        <p:txBody>
-          <a:bodyPr/>
-          <a:lstStyle/>
-          <a:p>
-            <a:pPr eaLnBrk="1" hangingPunct="1"/>
-            <a:r>
-              <a:rPr lang="en-US" dirty="0" smtClean="0"/>
-              <a:t>Thank You &amp; See You Again</a:t>
-            </a:r>
-          </a:p>
-        </p:txBody>
-      </p:sp>
       <p:pic>
         <p:nvPicPr>
-          <p:cNvPr id="5" name="Content Placeholder 4"/>
+          <p:cNvPr id="4" name="Picture 2" descr="https://lh3.ggpht.com/1IfZLL2QDSjZ0wS7sUhaMlsAOS8BBzdR3wZ1WawgRn7KZAM8nEVZYMOUM-lqQb0ikIzp=w300"/>
           <p:cNvPicPr>
-            <a:picLocks noGrp="1" noChangeAspect="1" noChangeArrowheads="1"/>
+            <a:picLocks noChangeAspect="1" noChangeArrowheads="1"/>
           </p:cNvPicPr>
-          <p:nvPr>
-            <p:ph idx="1"/>
-          </p:nvPr>
+          <p:nvPr/>
         </p:nvPicPr>
         <p:blipFill>
           <a:blip r:embed="rId2" cstate="print"/>
@@ -11524,11 +11420,14 @@
             <a:fillRect/>
           </a:stretch>
         </p:blipFill>
-        <p:spPr>
+        <p:spPr bwMode="auto">
           <a:xfrm>
-            <a:off x="1143000" y="1676400"/>
-            <a:ext cx="6810375" cy="4525963"/>
+            <a:off x="3276600" y="1905000"/>
+            <a:ext cx="2857500" cy="2857500"/>
           </a:xfrm>
+          <a:prstGeom prst="rect">
+            <a:avLst/>
+          </a:prstGeom>
           <a:noFill/>
         </p:spPr>
       </p:pic>
@@ -11537,13 +11436,126 @@
   <p:clrMapOvr>
     <a:masterClrMapping/>
   </p:clrMapOvr>
-  <p:timing>
-    <p:tnLst>
-      <p:par>
-        <p:cTn id="1" dur="indefinite" restart="never" nodeType="tmRoot"/>
-      </p:par>
-    </p:tnLst>
-  </p:timing>
+</p:sld>
+</file>
+
+<file path=ppt/slides/slide49.xml><?xml version="1.0" encoding="utf-8"?>
+<p:sld xmlns:a="http://schemas.openxmlformats.org/drawingml/2006/main" xmlns:r="http://schemas.openxmlformats.org/officeDocument/2006/relationships" xmlns:p="http://schemas.openxmlformats.org/presentationml/2006/main">
+  <p:cSld>
+    <p:spTree>
+      <p:nvGrpSpPr>
+        <p:cNvPr id="1" name=""/>
+        <p:cNvGrpSpPr/>
+        <p:nvPr/>
+      </p:nvGrpSpPr>
+      <p:grpSpPr>
+        <a:xfrm>
+          <a:off x="0" y="0"/>
+          <a:ext cx="0" cy="0"/>
+          <a:chOff x="0" y="0"/>
+          <a:chExt cx="0" cy="0"/>
+        </a:xfrm>
+      </p:grpSpPr>
+      <p:sp>
+        <p:nvSpPr>
+          <p:cNvPr id="2" name="Title 1"/>
+          <p:cNvSpPr>
+            <a:spLocks noGrp="1"/>
+          </p:cNvSpPr>
+          <p:nvPr>
+            <p:ph type="title"/>
+          </p:nvPr>
+        </p:nvSpPr>
+        <p:spPr/>
+        <p:txBody>
+          <a:bodyPr/>
+          <a:lstStyle/>
+          <a:p>
+            <a:r>
+              <a:rPr lang="en-US" dirty="0" err="1" smtClean="0"/>
+              <a:t>Traefik</a:t>
+            </a:r>
+            <a:endParaRPr lang="en-US" dirty="0"/>
+          </a:p>
+        </p:txBody>
+      </p:sp>
+      <p:sp>
+        <p:nvSpPr>
+          <p:cNvPr id="3" name="Content Placeholder 2"/>
+          <p:cNvSpPr>
+            <a:spLocks noGrp="1"/>
+          </p:cNvSpPr>
+          <p:nvPr>
+            <p:ph idx="1"/>
+          </p:nvPr>
+        </p:nvSpPr>
+        <p:spPr/>
+        <p:txBody>
+          <a:bodyPr/>
+          <a:lstStyle/>
+          <a:p>
+            <a:r>
+              <a:rPr lang="en-US" sz="2200" dirty="0" smtClean="0">
+                <a:hlinkClick r:id="rId2"/>
+              </a:rPr>
+              <a:t>https://</a:t>
+            </a:r>
+            <a:r>
+              <a:rPr lang="en-US" sz="2200" dirty="0" smtClean="0">
+                <a:hlinkClick r:id="rId2"/>
+              </a:rPr>
+              <a:t>traefik.io/traefik</a:t>
+            </a:r>
+            <a:endParaRPr lang="en-US" sz="2200" dirty="0" smtClean="0"/>
+          </a:p>
+          <a:p>
+            <a:r>
+              <a:rPr lang="en-US" sz="2200" dirty="0" smtClean="0"/>
+              <a:t>Unlike a traditional reverse proxy, which requires manual configuration, </a:t>
+            </a:r>
+            <a:r>
+              <a:rPr lang="en-US" sz="2200" dirty="0" err="1" smtClean="0"/>
+              <a:t>Traefik</a:t>
+            </a:r>
+            <a:r>
+              <a:rPr lang="en-US" sz="2200" dirty="0" smtClean="0"/>
+              <a:t> uses service discovery to dynamically configure routing.</a:t>
+            </a:r>
+            <a:endParaRPr lang="en-US" sz="2200" dirty="0"/>
+          </a:p>
+        </p:txBody>
+      </p:sp>
+      <p:pic>
+        <p:nvPicPr>
+          <p:cNvPr id="1026" name="Picture 2" descr="https://traefik.io/_next/image?url=%2Fimages%2Ftraefik%2Fintro%2Fdiagram%403x.png&amp;w=2048&amp;q=75"/>
+          <p:cNvPicPr>
+            <a:picLocks noChangeAspect="1" noChangeArrowheads="1"/>
+          </p:cNvPicPr>
+          <p:nvPr/>
+        </p:nvPicPr>
+        <p:blipFill>
+          <a:blip r:embed="rId3" cstate="print"/>
+          <a:srcRect/>
+          <a:stretch>
+            <a:fillRect/>
+          </a:stretch>
+        </p:blipFill>
+        <p:spPr bwMode="auto">
+          <a:xfrm>
+            <a:off x="1981200" y="3505200"/>
+            <a:ext cx="5203105" cy="2921666"/>
+          </a:xfrm>
+          <a:prstGeom prst="rect">
+            <a:avLst/>
+          </a:prstGeom>
+          <a:noFill/>
+        </p:spPr>
+      </p:pic>
+    </p:spTree>
+  </p:cSld>
+  <p:clrMapOvr>
+    <a:masterClrMapping/>
+  </p:clrMapOvr>
 </p:sld>
 </file>
 
@@ -11742,6 +11754,86 @@
   <p:clrMapOvr>
     <a:masterClrMapping/>
   </p:clrMapOvr>
+</p:sld>
+</file>
+
+<file path=ppt/slides/slide50.xml><?xml version="1.0" encoding="utf-8"?>
+<p:sld xmlns:a="http://schemas.openxmlformats.org/drawingml/2006/main" xmlns:r="http://schemas.openxmlformats.org/officeDocument/2006/relationships" xmlns:p="http://schemas.openxmlformats.org/presentationml/2006/main">
+  <p:cSld>
+    <p:spTree>
+      <p:nvGrpSpPr>
+        <p:cNvPr id="1" name=""/>
+        <p:cNvGrpSpPr/>
+        <p:nvPr/>
+      </p:nvGrpSpPr>
+      <p:grpSpPr>
+        <a:xfrm>
+          <a:off x="0" y="0"/>
+          <a:ext cx="0" cy="0"/>
+          <a:chOff x="0" y="0"/>
+          <a:chExt cx="0" cy="0"/>
+        </a:xfrm>
+      </p:grpSpPr>
+      <p:sp>
+        <p:nvSpPr>
+          <p:cNvPr id="18434" name="Title 1"/>
+          <p:cNvSpPr>
+            <a:spLocks noGrp="1"/>
+          </p:cNvSpPr>
+          <p:nvPr>
+            <p:ph type="title"/>
+          </p:nvPr>
+        </p:nvSpPr>
+        <p:spPr/>
+        <p:txBody>
+          <a:bodyPr/>
+          <a:lstStyle/>
+          <a:p>
+            <a:pPr eaLnBrk="1" hangingPunct="1"/>
+            <a:r>
+              <a:rPr lang="en-US" dirty="0" smtClean="0"/>
+              <a:t>Thank You &amp; See You Again</a:t>
+            </a:r>
+          </a:p>
+        </p:txBody>
+      </p:sp>
+      <p:pic>
+        <p:nvPicPr>
+          <p:cNvPr id="5" name="Content Placeholder 4"/>
+          <p:cNvPicPr>
+            <a:picLocks noGrp="1" noChangeAspect="1" noChangeArrowheads="1"/>
+          </p:cNvPicPr>
+          <p:nvPr>
+            <p:ph idx="1"/>
+          </p:nvPr>
+        </p:nvPicPr>
+        <p:blipFill>
+          <a:blip r:embed="rId2" cstate="print"/>
+          <a:srcRect/>
+          <a:stretch>
+            <a:fillRect/>
+          </a:stretch>
+        </p:blipFill>
+        <p:spPr>
+          <a:xfrm>
+            <a:off x="1143000" y="1676400"/>
+            <a:ext cx="6810375" cy="4525963"/>
+          </a:xfrm>
+          <a:noFill/>
+        </p:spPr>
+      </p:pic>
+    </p:spTree>
+  </p:cSld>
+  <p:clrMapOvr>
+    <a:masterClrMapping/>
+  </p:clrMapOvr>
+  <p:timing>
+    <p:tnLst>
+      <p:par>
+        <p:cTn id="1" dur="indefinite" restart="never" nodeType="tmRoot"/>
+      </p:par>
+    </p:tnLst>
+  </p:timing>
 </p:sld>
 </file>
 

--- a/Microservices/07.2. Load Balancing.pptx
+++ b/Microservices/07.2. Load Balancing.pptx
@@ -5,7 +5,7 @@
     <p:sldMasterId id="2147483708" r:id="rId1"/>
   </p:sldMasterIdLst>
   <p:notesMasterIdLst>
-    <p:notesMasterId r:id="rId52"/>
+    <p:notesMasterId r:id="rId54"/>
   </p:notesMasterIdLst>
   <p:sldIdLst>
     <p:sldId id="670" r:id="rId2"/>
@@ -54,10 +54,12 @@
     <p:sldId id="718" r:id="rId45"/>
     <p:sldId id="723" r:id="rId46"/>
     <p:sldId id="724" r:id="rId47"/>
-    <p:sldId id="725" r:id="rId48"/>
-    <p:sldId id="726" r:id="rId49"/>
-    <p:sldId id="727" r:id="rId50"/>
-    <p:sldId id="516" r:id="rId51"/>
+    <p:sldId id="728" r:id="rId48"/>
+    <p:sldId id="729" r:id="rId49"/>
+    <p:sldId id="725" r:id="rId50"/>
+    <p:sldId id="726" r:id="rId51"/>
+    <p:sldId id="727" r:id="rId52"/>
+    <p:sldId id="516" r:id="rId53"/>
   </p:sldIdLst>
   <p:sldSz cx="9144000" cy="6858000" type="screen4x3"/>
   <p:notesSz cx="6858000" cy="9144000"/>
@@ -272,7 +274,7 @@
             <a:fld id="{2F0940CE-BE1D-4C40-AF8B-3898A4D1F5EC}" type="datetimeFigureOut">
               <a:rPr lang="en-US" smtClean="0"/>
               <a:pPr/>
-              <a:t>8/6/2026</a:t>
+              <a:t>8/8/2026</a:t>
             </a:fld>
             <a:endParaRPr lang="en-US"/>
           </a:p>
@@ -620,6 +622,88 @@
 </p:notes>
 </file>
 
+<file path=ppt/notesSlides/notesSlide2.xml><?xml version="1.0" encoding="utf-8"?>
+<p:notes xmlns:a="http://schemas.openxmlformats.org/drawingml/2006/main" xmlns:r="http://schemas.openxmlformats.org/officeDocument/2006/relationships" xmlns:p="http://schemas.openxmlformats.org/presentationml/2006/main">
+  <p:cSld>
+    <p:spTree>
+      <p:nvGrpSpPr>
+        <p:cNvPr id="1" name=""/>
+        <p:cNvGrpSpPr/>
+        <p:nvPr/>
+      </p:nvGrpSpPr>
+      <p:grpSpPr>
+        <a:xfrm>
+          <a:off x="0" y="0"/>
+          <a:ext cx="0" cy="0"/>
+          <a:chOff x="0" y="0"/>
+          <a:chExt cx="0" cy="0"/>
+        </a:xfrm>
+      </p:grpSpPr>
+      <p:sp>
+        <p:nvSpPr>
+          <p:cNvPr id="2" name="Slide Image Placeholder 1"/>
+          <p:cNvSpPr>
+            <a:spLocks noGrp="1" noRot="1" noChangeAspect="1"/>
+          </p:cNvSpPr>
+          <p:nvPr>
+            <p:ph type="sldImg"/>
+          </p:nvPr>
+        </p:nvSpPr>
+        <p:spPr/>
+      </p:sp>
+      <p:sp>
+        <p:nvSpPr>
+          <p:cNvPr id="3" name="Notes Placeholder 2"/>
+          <p:cNvSpPr>
+            <a:spLocks noGrp="1"/>
+          </p:cNvSpPr>
+          <p:nvPr>
+            <p:ph type="body" idx="1"/>
+          </p:nvPr>
+        </p:nvSpPr>
+        <p:spPr/>
+        <p:txBody>
+          <a:bodyPr>
+            <a:normAutofit/>
+          </a:bodyPr>
+          <a:lstStyle/>
+          <a:p>
+            <a:endParaRPr lang="en-US" dirty="0"/>
+          </a:p>
+        </p:txBody>
+      </p:sp>
+      <p:sp>
+        <p:nvSpPr>
+          <p:cNvPr id="4" name="Slide Number Placeholder 3"/>
+          <p:cNvSpPr>
+            <a:spLocks noGrp="1"/>
+          </p:cNvSpPr>
+          <p:nvPr>
+            <p:ph type="sldNum" sz="quarter" idx="10"/>
+          </p:nvPr>
+        </p:nvSpPr>
+        <p:spPr/>
+        <p:txBody>
+          <a:bodyPr/>
+          <a:lstStyle/>
+          <a:p>
+            <a:fld id="{7570CC96-DB61-4850-AF79-05CA5E4B3D0A}" type="slidenum">
+              <a:rPr lang="en-US" smtClean="0"/>
+              <a:pPr/>
+              <a:t>46</a:t>
+            </a:fld>
+            <a:endParaRPr lang="en-US"/>
+          </a:p>
+        </p:txBody>
+      </p:sp>
+    </p:spTree>
+  </p:cSld>
+  <p:clrMapOvr>
+    <a:masterClrMapping/>
+  </p:clrMapOvr>
+</p:notes>
+</file>
+
 <file path=ppt/slideLayouts/slideLayout1.xml><?xml version="1.0" encoding="utf-8"?>
 <p:sldLayout xmlns:a="http://schemas.openxmlformats.org/drawingml/2006/main" xmlns:r="http://schemas.openxmlformats.org/officeDocument/2006/relationships" xmlns:p="http://schemas.openxmlformats.org/presentationml/2006/main" type="title" preserve="1">
   <p:cSld name="Title Slide">
@@ -811,7 +895,7 @@
               <a:pPr>
                 <a:defRPr/>
               </a:pPr>
-              <a:t>8/6/2026</a:t>
+              <a:t>8/8/2026</a:t>
             </a:fld>
             <a:endParaRPr lang="en-US"/>
           </a:p>
@@ -1003,7 +1087,7 @@
               <a:pPr>
                 <a:defRPr/>
               </a:pPr>
-              <a:t>8/6/2026</a:t>
+              <a:t>8/8/2026</a:t>
             </a:fld>
             <a:endParaRPr lang="en-US"/>
           </a:p>
@@ -1205,7 +1289,7 @@
               <a:pPr>
                 <a:defRPr/>
               </a:pPr>
-              <a:t>8/6/2026</a:t>
+              <a:t>8/8/2026</a:t>
             </a:fld>
             <a:endParaRPr lang="en-US"/>
           </a:p>
@@ -1397,7 +1481,7 @@
               <a:pPr>
                 <a:defRPr/>
               </a:pPr>
-              <a:t>8/6/2026</a:t>
+              <a:t>8/8/2026</a:t>
             </a:fld>
             <a:endParaRPr lang="en-US"/>
           </a:p>
@@ -1665,7 +1749,7 @@
               <a:pPr>
                 <a:defRPr/>
               </a:pPr>
-              <a:t>8/6/2026</a:t>
+              <a:t>8/8/2026</a:t>
             </a:fld>
             <a:endParaRPr lang="en-US"/>
           </a:p>
@@ -1975,7 +2059,7 @@
               <a:pPr>
                 <a:defRPr/>
               </a:pPr>
-              <a:t>8/6/2026</a:t>
+              <a:t>8/8/2026</a:t>
             </a:fld>
             <a:endParaRPr lang="en-US"/>
           </a:p>
@@ -2419,7 +2503,7 @@
               <a:pPr>
                 <a:defRPr/>
               </a:pPr>
-              <a:t>8/6/2026</a:t>
+              <a:t>8/8/2026</a:t>
             </a:fld>
             <a:endParaRPr lang="en-US"/>
           </a:p>
@@ -2559,7 +2643,7 @@
               <a:pPr>
                 <a:defRPr/>
               </a:pPr>
-              <a:t>8/6/2026</a:t>
+              <a:t>8/8/2026</a:t>
             </a:fld>
             <a:endParaRPr lang="en-US"/>
           </a:p>
@@ -2676,7 +2760,7 @@
               <a:pPr>
                 <a:defRPr/>
               </a:pPr>
-              <a:t>8/6/2026</a:t>
+              <a:t>8/8/2026</a:t>
             </a:fld>
             <a:endParaRPr lang="en-US"/>
           </a:p>
@@ -2975,7 +3059,7 @@
               <a:pPr>
                 <a:defRPr/>
               </a:pPr>
-              <a:t>8/6/2026</a:t>
+              <a:t>8/8/2026</a:t>
             </a:fld>
             <a:endParaRPr lang="en-US"/>
           </a:p>
@@ -3253,7 +3337,7 @@
               <a:pPr>
                 <a:defRPr/>
               </a:pPr>
-              <a:t>8/6/2026</a:t>
+              <a:t>8/8/2026</a:t>
             </a:fld>
             <a:endParaRPr lang="en-US"/>
           </a:p>
@@ -3501,7 +3585,7 @@
               <a:pPr>
                 <a:defRPr/>
               </a:pPr>
-              <a:t>8/6/2026</a:t>
+              <a:t>8/8/2026</a:t>
             </a:fld>
             <a:endParaRPr lang="en-US"/>
           </a:p>
@@ -10973,8 +11057,21 @@
             </a:r>
             <a:r>
               <a:rPr lang="en-US" sz="2400" dirty="0" smtClean="0"/>
-              <a:t> has 1% probability of being slow (p99 event)</a:t>
-            </a:r>
+              <a:t> has </a:t>
+            </a:r>
+            <a:r>
+              <a:rPr lang="en-US" sz="2400" b="1" dirty="0" smtClean="0"/>
+              <a:t>1% probability</a:t>
+            </a:r>
+            <a:r>
+              <a:rPr lang="en-US" sz="2400" dirty="0" smtClean="0"/>
+              <a:t> of being slow (p99 event</a:t>
+            </a:r>
+            <a:r>
+              <a:rPr lang="en-US" sz="2400" dirty="0" smtClean="0"/>
+              <a:t>),</a:t>
+            </a:r>
+            <a:endParaRPr lang="en-US" sz="2400" dirty="0" smtClean="0"/>
           </a:p>
           <a:p>
             <a:pPr>
@@ -10982,11 +11079,19 @@
             </a:pPr>
             <a:r>
               <a:rPr lang="en-US" sz="2400" dirty="0" smtClean="0"/>
-              <a:t>	A page requires 100 parallel </a:t>
-            </a:r>
-            <a:r>
-              <a:rPr lang="en-US" sz="2400" dirty="0" err="1" smtClean="0"/>
+              <a:t>	A page requires </a:t>
+            </a:r>
+            <a:r>
+              <a:rPr lang="en-US" sz="2400" b="1" dirty="0" smtClean="0"/>
+              <a:t>100 parallel </a:t>
+            </a:r>
+            <a:r>
+              <a:rPr lang="en-US" sz="2400" b="1" dirty="0" err="1" smtClean="0"/>
               <a:t>subrequests</a:t>
+            </a:r>
+            <a:r>
+              <a:rPr lang="en-US" sz="2400" dirty="0" smtClean="0"/>
+              <a:t>,</a:t>
             </a:r>
             <a:endParaRPr lang="en-US" sz="2400" dirty="0" smtClean="0"/>
           </a:p>
@@ -11002,21 +11107,65 @@
             </a:pPr>
             <a:r>
               <a:rPr lang="en-US" sz="2400" dirty="0" smtClean="0"/>
-              <a:t>	P(at least one slow)≈1−(0.99)</a:t>
+              <a:t>	</a:t>
+            </a:r>
+            <a:r>
+              <a:rPr lang="en-US" sz="2400" b="1" dirty="0" smtClean="0"/>
+              <a:t>P(at least one slow</a:t>
+            </a:r>
+            <a:r>
+              <a:rPr lang="en-US" sz="2400" b="1" dirty="0" smtClean="0"/>
+              <a:t>) </a:t>
+            </a:r>
+            <a:r>
+              <a:rPr lang="en-US" sz="2400" dirty="0" smtClean="0"/>
+              <a:t>≈ 1 − (0.99)</a:t>
             </a:r>
             <a:r>
               <a:rPr lang="en-US" sz="2400" baseline="30000" dirty="0" smtClean="0"/>
-              <a:t>100</a:t>
+              <a:t>100 </a:t>
             </a:r>
             <a:r>
               <a:rPr lang="en-US" sz="2400" dirty="0" smtClean="0"/>
-              <a:t>≈63% </a:t>
-            </a:r>
-          </a:p>
-          <a:p>
+              <a:t>≈ </a:t>
+            </a:r>
+            <a:r>
+              <a:rPr lang="en-US" sz="2400" b="1" dirty="0" smtClean="0"/>
+              <a:t>63</a:t>
+            </a:r>
+            <a:r>
+              <a:rPr lang="en-US" sz="2400" b="1" dirty="0" smtClean="0"/>
+              <a:t>%</a:t>
+            </a:r>
             <a:r>
               <a:rPr lang="en-US" sz="2400" dirty="0" smtClean="0"/>
-              <a:t>So even if each component is “99% fast,” the overall request is slow most of the time.</a:t>
+              <a:t> </a:t>
+            </a:r>
+          </a:p>
+          <a:p>
+            <a:r>
+              <a:rPr lang="en-US" sz="2400" dirty="0" smtClean="0"/>
+              <a:t>So even if each component is “</a:t>
+            </a:r>
+            <a:r>
+              <a:rPr lang="en-US" sz="2400" i="1" dirty="0" smtClean="0"/>
+              <a:t>99% fast</a:t>
+            </a:r>
+            <a:r>
+              <a:rPr lang="en-US" sz="2400" dirty="0" smtClean="0"/>
+              <a:t>,” the overall request is </a:t>
+            </a:r>
+            <a:r>
+              <a:rPr lang="en-US" sz="2400" i="1" dirty="0" smtClean="0">
+                <a:solidFill>
+                  <a:srgbClr val="C00000"/>
+                </a:solidFill>
+              </a:rPr>
+              <a:t>slow most of the time</a:t>
+            </a:r>
+            <a:r>
+              <a:rPr lang="en-US" sz="2400" dirty="0" smtClean="0"/>
+              <a:t>.</a:t>
             </a:r>
           </a:p>
           <a:p>
@@ -11102,7 +11251,19 @@
             </a:pPr>
             <a:r>
               <a:rPr lang="en-US" sz="2400" dirty="0" smtClean="0"/>
-              <a:t>	"What is the average latency?"</a:t>
+              <a:t>	"What is the </a:t>
+            </a:r>
+            <a:r>
+              <a:rPr lang="en-US" sz="2400" i="1" dirty="0" smtClean="0">
+                <a:solidFill>
+                  <a:srgbClr val="C00000"/>
+                </a:solidFill>
+              </a:rPr>
+              <a:t>average</a:t>
+            </a:r>
+            <a:r>
+              <a:rPr lang="en-US" sz="2400" dirty="0" smtClean="0"/>
+              <a:t> latency?"</a:t>
             </a:r>
           </a:p>
           <a:p>
@@ -11160,11 +11321,15 @@
             </a:pPr>
             <a:r>
               <a:rPr lang="en-US" sz="2400" dirty="0" smtClean="0"/>
-              <a:t>	P(</a:t>
+              <a:t>	P</a:t>
+            </a:r>
+            <a:r>
+              <a:rPr lang="en-US" sz="2400" dirty="0" smtClean="0"/>
+              <a:t>( T ≤ </a:t>
             </a:r>
             <a:r>
               <a:rPr lang="en-US" sz="2400" dirty="0" err="1" smtClean="0"/>
-              <a:t>T≤t</a:t>
+              <a:t>t</a:t>
             </a:r>
             <a:r>
               <a:rPr lang="en-US" sz="2400" baseline="-25000" dirty="0" err="1" smtClean="0"/>
@@ -11172,7 +11337,7 @@
             </a:r>
             <a:r>
               <a:rPr lang="en-US" sz="2400" dirty="0" smtClean="0"/>
-              <a:t>)=p</a:t>
+              <a:t> ) = p</a:t>
             </a:r>
           </a:p>
           <a:p>
@@ -11185,7 +11350,15 @@
             </a:r>
             <a:r>
               <a:rPr lang="en-US" sz="2400" dirty="0" smtClean="0"/>
-              <a:t>: 99% of requests complete faster than this value.</a:t>
+              <a:t>: 99% of requests complete </a:t>
+            </a:r>
+            <a:r>
+              <a:rPr lang="en-US" sz="2400" b="1" dirty="0" smtClean="0"/>
+              <a:t>faster</a:t>
+            </a:r>
+            <a:r>
+              <a:rPr lang="en-US" sz="2400" dirty="0" smtClean="0"/>
+              <a:t> than this value.</a:t>
             </a:r>
           </a:p>
           <a:p>
@@ -11198,7 +11371,15 @@
             </a:r>
             <a:r>
               <a:rPr lang="en-US" sz="2400" dirty="0" smtClean="0"/>
-              <a:t>: 99.9% complete faster.</a:t>
+              <a:t>: 99.9% complete </a:t>
+            </a:r>
+            <a:r>
+              <a:rPr lang="en-US" sz="2400" b="1" dirty="0" smtClean="0"/>
+              <a:t>faster</a:t>
+            </a:r>
+            <a:r>
+              <a:rPr lang="en-US" sz="2400" dirty="0" smtClean="0"/>
+              <a:t>.</a:t>
             </a:r>
           </a:p>
           <a:p>
@@ -11272,11 +11453,11 @@
           <a:p>
             <a:r>
               <a:rPr lang="en-US" dirty="0" smtClean="0"/>
-              <a:t>Tail-tolerant </a:t>
-            </a:r>
-            <a:r>
-              <a:rPr lang="en-US" smtClean="0"/>
-              <a:t>Techniques [2]</a:t>
+              <a:t>p99 = 10 </a:t>
+            </a:r>
+            <a:r>
+              <a:rPr lang="en-US" dirty="0" smtClean="0"/>
+              <a:t>ms Meaning</a:t>
             </a:r>
             <a:endParaRPr lang="en-US" dirty="0"/>
           </a:p>
@@ -11298,85 +11479,85 @@
           <a:lstStyle/>
           <a:p>
             <a:r>
-              <a:rPr lang="en-US" sz="2400" i="1" dirty="0" smtClean="0">
-                <a:solidFill>
-                  <a:srgbClr val="C00000"/>
-                </a:solidFill>
-              </a:rPr>
-              <a:t>Hedged requests</a:t>
-            </a:r>
+              <a:rPr lang="en-US" sz="2800" b="1" dirty="0" smtClean="0"/>
+              <a:t>p99 = 10 ms</a:t>
+            </a:r>
+            <a:r>
+              <a:rPr lang="en-US" sz="2800" dirty="0" smtClean="0"/>
+              <a:t> means the </a:t>
+            </a:r>
+            <a:r>
+              <a:rPr lang="en-US" sz="2800" b="1" dirty="0" smtClean="0"/>
+              <a:t>99th percentile latency is 10 milliseconds</a:t>
+            </a:r>
+            <a:r>
+              <a:rPr lang="en-US" sz="2800" dirty="0" smtClean="0"/>
+              <a:t>.</a:t>
+            </a:r>
+          </a:p>
+          <a:p>
+            <a:r>
+              <a:rPr lang="en-US" sz="2800" dirty="0" smtClean="0"/>
+              <a:t>In practical terms, if you measure 10,000 requests and sort them from fastest to slowest:</a:t>
+            </a:r>
+          </a:p>
+          <a:p>
+            <a:pPr lvl="1"/>
             <a:r>
               <a:rPr lang="en-US" sz="2400" dirty="0" smtClean="0"/>
-              <a:t>. A simple way to curb latency variability is to issue the same request to </a:t>
-            </a:r>
-            <a:r>
-              <a:rPr lang="en-US" sz="2400" u="sng" dirty="0" smtClean="0"/>
-              <a:t>multiple replicas</a:t>
+              <a:t>About </a:t>
+            </a:r>
+            <a:r>
+              <a:rPr lang="en-US" sz="2400" b="1" dirty="0" smtClean="0"/>
+              <a:t>9,900 requests finish in 10 ms or less</a:t>
             </a:r>
             <a:r>
               <a:rPr lang="en-US" sz="2400" dirty="0" smtClean="0"/>
-              <a:t> and use the results from whichever replica responds </a:t>
-            </a:r>
-            <a:r>
-              <a:rPr lang="en-US" sz="2400" u="sng" dirty="0" smtClean="0"/>
-              <a:t>first</a:t>
-            </a:r>
+              <a:t>. </a:t>
+            </a:r>
+          </a:p>
+          <a:p>
+            <a:pPr lvl="1"/>
             <a:r>
               <a:rPr lang="en-US" sz="2400" dirty="0" smtClean="0"/>
+              <a:t>About </a:t>
+            </a:r>
+            <a:r>
+              <a:rPr lang="en-US" sz="2400" b="1" dirty="0" smtClean="0"/>
+              <a:t>100 requests take longer than 10 </a:t>
+            </a:r>
+            <a:r>
+              <a:rPr lang="en-US" sz="2400" b="1" dirty="0" err="1" smtClean="0"/>
+              <a:t>ms</a:t>
+            </a:r>
+            <a:r>
+              <a:rPr lang="en-US" sz="2400" dirty="0" err="1" smtClean="0"/>
               <a:t>.</a:t>
             </a:r>
-          </a:p>
-          <a:p>
-            <a:r>
-              <a:rPr lang="en-US" sz="2400" i="1" dirty="0" smtClean="0">
-                <a:solidFill>
-                  <a:srgbClr val="C00000"/>
-                </a:solidFill>
-              </a:rPr>
-              <a:t>Micro-partitions</a:t>
-            </a:r>
-            <a:r>
-              <a:rPr lang="en-US" sz="2400" dirty="0" smtClean="0"/>
-              <a:t>. To combat </a:t>
-            </a:r>
-            <a:r>
-              <a:rPr lang="en-US" sz="2400" u="sng" dirty="0" smtClean="0"/>
-              <a:t>imbalance</a:t>
-            </a:r>
-            <a:r>
-              <a:rPr lang="en-US" sz="2400" dirty="0" smtClean="0"/>
-              <a:t>, many of Google’s systems generate many </a:t>
-            </a:r>
-            <a:r>
-              <a:rPr lang="en-US" sz="2400" u="sng" dirty="0" smtClean="0"/>
-              <a:t>more partitions</a:t>
-            </a:r>
-            <a:r>
-              <a:rPr lang="en-US" sz="2400" dirty="0" smtClean="0"/>
-              <a:t> than there are machines in the service, then do dynamic assignment and </a:t>
-            </a:r>
-            <a:r>
-              <a:rPr lang="en-US" sz="2400" u="sng" dirty="0" smtClean="0"/>
-              <a:t>load balancing of these partitions</a:t>
-            </a:r>
-            <a:r>
-              <a:rPr lang="en-US" sz="2400" dirty="0" smtClean="0"/>
-              <a:t> to particular machines.</a:t>
-            </a:r>
-          </a:p>
-          <a:p>
-            <a:r>
-              <a:rPr lang="en-US" sz="2400" i="1" dirty="0" smtClean="0">
-                <a:solidFill>
-                  <a:srgbClr val="C00000"/>
-                </a:solidFill>
-              </a:rPr>
-              <a:t>Selective replication</a:t>
-            </a:r>
-            <a:r>
-              <a:rPr lang="en-US" sz="2400" dirty="0" smtClean="0"/>
-              <a:t>. An enhancement of the micro-partitioning scheme is to detect or even predict certain items that are likely to cause load imbalance and create additional replicas of these items.</a:t>
-            </a:r>
+            <a:endParaRPr lang="en-US" sz="2400" dirty="0" smtClean="0"/>
+          </a:p>
+          <a:p>
+            <a:r>
+              <a:rPr lang="en-US" sz="2800" dirty="0" smtClean="0"/>
+              <a:t>One important nuance is that </a:t>
+            </a:r>
+            <a:r>
+              <a:rPr lang="en-US" sz="2800" b="1" dirty="0" smtClean="0"/>
+              <a:t>p99 = 10 ms does not mean the slowest request takes 10 </a:t>
+            </a:r>
+            <a:r>
+              <a:rPr lang="en-US" sz="2800" b="1" dirty="0" err="1" smtClean="0"/>
+              <a:t>ms</a:t>
+            </a:r>
+            <a:r>
+              <a:rPr lang="en-US" sz="2800" dirty="0" err="1" smtClean="0"/>
+              <a:t>.</a:t>
+            </a:r>
+            <a:r>
+              <a:rPr lang="en-US" sz="2800" dirty="0" smtClean="0"/>
+              <a:t> The maximum could be 20 ms, 500 ms, or several seconds.</a:t>
+            </a:r>
+            <a:endParaRPr lang="en-US" sz="2800" dirty="0"/>
           </a:p>
         </p:txBody>
       </p:sp>
@@ -11389,6 +11570,526 @@
 </file>
 
 <file path=ppt/slides/slide48.xml><?xml version="1.0" encoding="utf-8"?>
+<p:sld xmlns:a="http://schemas.openxmlformats.org/drawingml/2006/main" xmlns:r="http://schemas.openxmlformats.org/officeDocument/2006/relationships" xmlns:p="http://schemas.openxmlformats.org/presentationml/2006/main">
+  <p:cSld>
+    <p:spTree>
+      <p:nvGrpSpPr>
+        <p:cNvPr id="1" name=""/>
+        <p:cNvGrpSpPr/>
+        <p:nvPr/>
+      </p:nvGrpSpPr>
+      <p:grpSpPr>
+        <a:xfrm>
+          <a:off x="0" y="0"/>
+          <a:ext cx="0" cy="0"/>
+          <a:chOff x="0" y="0"/>
+          <a:chExt cx="0" cy="0"/>
+        </a:xfrm>
+      </p:grpSpPr>
+      <p:sp>
+        <p:nvSpPr>
+          <p:cNvPr id="2" name="Title 1"/>
+          <p:cNvSpPr>
+            <a:spLocks noGrp="1"/>
+          </p:cNvSpPr>
+          <p:nvPr>
+            <p:ph type="title"/>
+          </p:nvPr>
+        </p:nvSpPr>
+        <p:spPr/>
+        <p:txBody>
+          <a:bodyPr/>
+          <a:lstStyle/>
+          <a:p>
+            <a:r>
+              <a:rPr lang="en-US" dirty="0" smtClean="0"/>
+              <a:t>Practical Implication</a:t>
+            </a:r>
+            <a:endParaRPr lang="en-US" dirty="0"/>
+          </a:p>
+        </p:txBody>
+      </p:sp>
+      <p:sp>
+        <p:nvSpPr>
+          <p:cNvPr id="3" name="Content Placeholder 2"/>
+          <p:cNvSpPr>
+            <a:spLocks noGrp="1"/>
+          </p:cNvSpPr>
+          <p:nvPr>
+            <p:ph idx="1"/>
+          </p:nvPr>
+        </p:nvSpPr>
+        <p:spPr/>
+        <p:txBody>
+          <a:bodyPr/>
+          <a:lstStyle/>
+          <a:p>
+            <a:r>
+              <a:rPr lang="en-US" sz="2400" b="1" dirty="0" smtClean="0"/>
+              <a:t>Set </a:t>
+            </a:r>
+            <a:r>
+              <a:rPr lang="en-US" sz="2400" b="1" smtClean="0"/>
+              <a:t>an </a:t>
+            </a:r>
+            <a:r>
+              <a:rPr lang="en-US" sz="2400" b="1" smtClean="0"/>
+              <a:t>SLO (Service Level Objective):</a:t>
+            </a:r>
+            <a:r>
+              <a:rPr lang="en-US" sz="2400" smtClean="0"/>
+              <a:t> </a:t>
+            </a:r>
+            <a:r>
+              <a:rPr lang="en-US" sz="2400" dirty="0" smtClean="0"/>
+              <a:t>"99</a:t>
+            </a:r>
+            <a:r>
+              <a:rPr lang="en-US" sz="2400" dirty="0" smtClean="0"/>
+              <a:t>% of requests must complete within 10 </a:t>
+            </a:r>
+            <a:r>
+              <a:rPr lang="en-US" sz="2400" dirty="0" err="1" smtClean="0"/>
+              <a:t>ms</a:t>
+            </a:r>
+            <a:r>
+              <a:rPr lang="en-US" sz="2400" dirty="0" err="1" smtClean="0"/>
+              <a:t>.</a:t>
+            </a:r>
+            <a:r>
+              <a:rPr lang="en-US" sz="2400" dirty="0" smtClean="0"/>
+              <a:t>"</a:t>
+            </a:r>
+            <a:endParaRPr lang="en-US" sz="2400" dirty="0" smtClean="0"/>
+          </a:p>
+          <a:p>
+            <a:r>
+              <a:rPr lang="en-US" sz="2400" b="1" dirty="0" smtClean="0"/>
+              <a:t>Detect </a:t>
+            </a:r>
+            <a:r>
+              <a:rPr lang="en-US" sz="2400" b="1" dirty="0" smtClean="0"/>
+              <a:t>regressions:</a:t>
+            </a:r>
+            <a:r>
+              <a:rPr lang="en-US" sz="2400" dirty="0" smtClean="0"/>
+              <a:t> If a new release changes p99 from 10 ms to 25 ms while p50 stays at 3 ms, the release probably introduced a tail-latency problem</a:t>
+            </a:r>
+            <a:r>
+              <a:rPr lang="en-US" sz="2400" dirty="0" smtClean="0"/>
+              <a:t>.</a:t>
+            </a:r>
+          </a:p>
+          <a:p>
+            <a:r>
+              <a:rPr lang="en-US" sz="2400" b="1" dirty="0" smtClean="0"/>
+              <a:t>Create </a:t>
+            </a:r>
+            <a:r>
+              <a:rPr lang="en-US" sz="2400" b="1" dirty="0" smtClean="0"/>
+              <a:t>alerts:</a:t>
+            </a:r>
+            <a:r>
+              <a:rPr lang="en-US" sz="2400" dirty="0" smtClean="0"/>
+              <a:t> Alert when p99 exceeds, say, 15 ms for a sustained </a:t>
+            </a:r>
+            <a:r>
+              <a:rPr lang="en-US" sz="2400" dirty="0" smtClean="0"/>
+              <a:t>period.</a:t>
+            </a:r>
+          </a:p>
+          <a:p>
+            <a:r>
+              <a:rPr lang="en-US" sz="2400" b="1" dirty="0" smtClean="0"/>
+              <a:t>Compare </a:t>
+            </a:r>
+            <a:r>
+              <a:rPr lang="en-US" sz="2400" b="1" dirty="0" smtClean="0"/>
+              <a:t>implementations:</a:t>
+            </a:r>
+            <a:r>
+              <a:rPr lang="en-US" sz="2400" dirty="0" smtClean="0"/>
+              <a:t> Version A has p99 = 10 ms and Version B has p99 = 18 ms, so A gives more predictable </a:t>
+            </a:r>
+            <a:r>
+              <a:rPr lang="en-US" sz="2400" dirty="0" smtClean="0"/>
+              <a:t>latency.</a:t>
+            </a:r>
+          </a:p>
+          <a:p>
+            <a:r>
+              <a:rPr lang="en-US" sz="2400" b="1" dirty="0" smtClean="0"/>
+              <a:t>Test </a:t>
+            </a:r>
+            <a:r>
+              <a:rPr lang="en-US" sz="2400" b="1" dirty="0" smtClean="0"/>
+              <a:t>capacity:</a:t>
+            </a:r>
+            <a:r>
+              <a:rPr lang="en-US" sz="2400" dirty="0" smtClean="0"/>
+              <a:t> Run load tests at 1,000, 5,000, and 10,000 requests/sec and observe when p99 begins increasing sharply.</a:t>
+            </a:r>
+            <a:endParaRPr lang="en-US" sz="2400" dirty="0"/>
+          </a:p>
+        </p:txBody>
+      </p:sp>
+    </p:spTree>
+  </p:cSld>
+  <p:clrMapOvr>
+    <a:masterClrMapping/>
+  </p:clrMapOvr>
+</p:sld>
+</file>
+
+<file path=ppt/slides/slide49.xml><?xml version="1.0" encoding="utf-8"?>
+<p:sld xmlns:a="http://schemas.openxmlformats.org/drawingml/2006/main" xmlns:r="http://schemas.openxmlformats.org/officeDocument/2006/relationships" xmlns:p="http://schemas.openxmlformats.org/presentationml/2006/main">
+  <p:cSld>
+    <p:spTree>
+      <p:nvGrpSpPr>
+        <p:cNvPr id="1" name=""/>
+        <p:cNvGrpSpPr/>
+        <p:nvPr/>
+      </p:nvGrpSpPr>
+      <p:grpSpPr>
+        <a:xfrm>
+          <a:off x="0" y="0"/>
+          <a:ext cx="0" cy="0"/>
+          <a:chOff x="0" y="0"/>
+          <a:chExt cx="0" cy="0"/>
+        </a:xfrm>
+      </p:grpSpPr>
+      <p:sp>
+        <p:nvSpPr>
+          <p:cNvPr id="2" name="Title 1"/>
+          <p:cNvSpPr>
+            <a:spLocks noGrp="1"/>
+          </p:cNvSpPr>
+          <p:nvPr>
+            <p:ph type="title"/>
+          </p:nvPr>
+        </p:nvSpPr>
+        <p:spPr/>
+        <p:txBody>
+          <a:bodyPr/>
+          <a:lstStyle/>
+          <a:p>
+            <a:r>
+              <a:rPr lang="en-US" dirty="0" smtClean="0"/>
+              <a:t>Tail-tolerant </a:t>
+            </a:r>
+            <a:r>
+              <a:rPr lang="en-US" smtClean="0"/>
+              <a:t>Techniques [2]</a:t>
+            </a:r>
+            <a:endParaRPr lang="en-US" dirty="0"/>
+          </a:p>
+        </p:txBody>
+      </p:sp>
+      <p:sp>
+        <p:nvSpPr>
+          <p:cNvPr id="3" name="Content Placeholder 2"/>
+          <p:cNvSpPr>
+            <a:spLocks noGrp="1"/>
+          </p:cNvSpPr>
+          <p:nvPr>
+            <p:ph idx="1"/>
+          </p:nvPr>
+        </p:nvSpPr>
+        <p:spPr/>
+        <p:txBody>
+          <a:bodyPr/>
+          <a:lstStyle/>
+          <a:p>
+            <a:r>
+              <a:rPr lang="en-US" sz="2400" i="1" dirty="0" smtClean="0">
+                <a:solidFill>
+                  <a:srgbClr val="C00000"/>
+                </a:solidFill>
+              </a:rPr>
+              <a:t>Hedged requests</a:t>
+            </a:r>
+            <a:r>
+              <a:rPr lang="en-US" sz="2400" dirty="0" smtClean="0"/>
+              <a:t>. A simple way to curb latency variability is to issue the same request to </a:t>
+            </a:r>
+            <a:r>
+              <a:rPr lang="en-US" sz="2400" u="sng" dirty="0" smtClean="0"/>
+              <a:t>multiple replicas</a:t>
+            </a:r>
+            <a:r>
+              <a:rPr lang="en-US" sz="2400" dirty="0" smtClean="0"/>
+              <a:t> and use the results from whichever replica responds </a:t>
+            </a:r>
+            <a:r>
+              <a:rPr lang="en-US" sz="2400" u="sng" dirty="0" smtClean="0"/>
+              <a:t>first</a:t>
+            </a:r>
+            <a:r>
+              <a:rPr lang="en-US" sz="2400" dirty="0" smtClean="0"/>
+              <a:t>.</a:t>
+            </a:r>
+          </a:p>
+          <a:p>
+            <a:r>
+              <a:rPr lang="en-US" sz="2400" i="1" dirty="0" smtClean="0">
+                <a:solidFill>
+                  <a:srgbClr val="C00000"/>
+                </a:solidFill>
+              </a:rPr>
+              <a:t>Micro-partitions</a:t>
+            </a:r>
+            <a:r>
+              <a:rPr lang="en-US" sz="2400" dirty="0" smtClean="0"/>
+              <a:t>. To combat </a:t>
+            </a:r>
+            <a:r>
+              <a:rPr lang="en-US" sz="2400" u="sng" dirty="0" smtClean="0"/>
+              <a:t>imbalance</a:t>
+            </a:r>
+            <a:r>
+              <a:rPr lang="en-US" sz="2400" dirty="0" smtClean="0"/>
+              <a:t>, many of Google’s systems generate many </a:t>
+            </a:r>
+            <a:r>
+              <a:rPr lang="en-US" sz="2400" u="sng" dirty="0" smtClean="0"/>
+              <a:t>more partitions</a:t>
+            </a:r>
+            <a:r>
+              <a:rPr lang="en-US" sz="2400" dirty="0" smtClean="0"/>
+              <a:t> than there are machines in the service, then do dynamic assignment and </a:t>
+            </a:r>
+            <a:r>
+              <a:rPr lang="en-US" sz="2400" u="sng" dirty="0" smtClean="0"/>
+              <a:t>load balancing of these partitions</a:t>
+            </a:r>
+            <a:r>
+              <a:rPr lang="en-US" sz="2400" dirty="0" smtClean="0"/>
+              <a:t> to particular machines.</a:t>
+            </a:r>
+          </a:p>
+          <a:p>
+            <a:r>
+              <a:rPr lang="en-US" sz="2400" i="1" dirty="0" smtClean="0">
+                <a:solidFill>
+                  <a:srgbClr val="C00000"/>
+                </a:solidFill>
+              </a:rPr>
+              <a:t>Selective replication</a:t>
+            </a:r>
+            <a:r>
+              <a:rPr lang="en-US" sz="2400" dirty="0" smtClean="0"/>
+              <a:t>. An enhancement of the micro-partitioning scheme is to detect or even predict certain items that are likely to cause load imbalance and create additional replicas of these items.</a:t>
+            </a:r>
+          </a:p>
+        </p:txBody>
+      </p:sp>
+    </p:spTree>
+  </p:cSld>
+  <p:clrMapOvr>
+    <a:masterClrMapping/>
+  </p:clrMapOvr>
+</p:sld>
+</file>
+
+<file path=ppt/slides/slide5.xml><?xml version="1.0" encoding="utf-8"?>
+<p:sld xmlns:a="http://schemas.openxmlformats.org/drawingml/2006/main" xmlns:r="http://schemas.openxmlformats.org/officeDocument/2006/relationships" xmlns:p="http://schemas.openxmlformats.org/presentationml/2006/main">
+  <p:cSld>
+    <p:spTree>
+      <p:nvGrpSpPr>
+        <p:cNvPr id="1" name=""/>
+        <p:cNvGrpSpPr/>
+        <p:nvPr/>
+      </p:nvGrpSpPr>
+      <p:grpSpPr>
+        <a:xfrm>
+          <a:off x="0" y="0"/>
+          <a:ext cx="0" cy="0"/>
+          <a:chOff x="0" y="0"/>
+          <a:chExt cx="0" cy="0"/>
+        </a:xfrm>
+      </p:grpSpPr>
+      <p:sp>
+        <p:nvSpPr>
+          <p:cNvPr id="2" name="Title 1"/>
+          <p:cNvSpPr>
+            <a:spLocks noGrp="1"/>
+          </p:cNvSpPr>
+          <p:nvPr>
+            <p:ph type="title"/>
+          </p:nvPr>
+        </p:nvSpPr>
+        <p:spPr/>
+        <p:txBody>
+          <a:bodyPr/>
+          <a:lstStyle/>
+          <a:p>
+            <a:r>
+              <a:rPr lang="en-US" dirty="0" smtClean="0"/>
+              <a:t>Solving a Problem: The </a:t>
+            </a:r>
+            <a:r>
+              <a:rPr lang="en-US" i="1" dirty="0" smtClean="0">
+                <a:solidFill>
+                  <a:srgbClr val="C00000"/>
+                </a:solidFill>
+              </a:rPr>
+              <a:t>Hard</a:t>
+            </a:r>
+            <a:r>
+              <a:rPr lang="en-US" dirty="0" smtClean="0"/>
+              <a:t> Part</a:t>
+            </a:r>
+            <a:endParaRPr lang="en-US" dirty="0"/>
+          </a:p>
+        </p:txBody>
+      </p:sp>
+      <p:sp>
+        <p:nvSpPr>
+          <p:cNvPr id="3" name="Content Placeholder 2"/>
+          <p:cNvSpPr>
+            <a:spLocks noGrp="1"/>
+          </p:cNvSpPr>
+          <p:nvPr>
+            <p:ph idx="1"/>
+          </p:nvPr>
+        </p:nvSpPr>
+        <p:spPr/>
+        <p:txBody>
+          <a:bodyPr/>
+          <a:lstStyle/>
+          <a:p>
+            <a:r>
+              <a:rPr lang="en-US" sz="2400" i="1" dirty="0" smtClean="0">
+                <a:solidFill>
+                  <a:srgbClr val="C00000"/>
+                </a:solidFill>
+              </a:rPr>
+              <a:t>Input</a:t>
+            </a:r>
+            <a:r>
+              <a:rPr lang="en-US" sz="2400" dirty="0" smtClean="0"/>
+              <a:t>:</a:t>
+            </a:r>
+          </a:p>
+          <a:p>
+            <a:pPr lvl="1"/>
+            <a:r>
+              <a:rPr lang="en-US" sz="2000" dirty="0" smtClean="0"/>
+              <a:t>Story: As sponsors, we want the system to be able to run on 2 web servers so that we can serve as many customers as we want.</a:t>
+            </a:r>
+          </a:p>
+          <a:p>
+            <a:pPr lvl="1"/>
+            <a:r>
+              <a:rPr lang="en-US" sz="2000" dirty="0" smtClean="0"/>
+              <a:t>Developer: Ngo Huy Bien.</a:t>
+            </a:r>
+          </a:p>
+          <a:p>
+            <a:r>
+              <a:rPr lang="en-US" sz="2400" dirty="0" smtClean="0"/>
+              <a:t>Bonus: </a:t>
+            </a:r>
+          </a:p>
+          <a:p>
+            <a:pPr lvl="1"/>
+            <a:r>
+              <a:rPr lang="en-US" sz="2000" dirty="0" smtClean="0"/>
+              <a:t>UI + Architecture.</a:t>
+            </a:r>
+          </a:p>
+          <a:p>
+            <a:pPr lvl="1"/>
+            <a:r>
+              <a:rPr lang="en-US" sz="2000" dirty="0" smtClean="0"/>
+              <a:t>Scenarios, Domain Models + ERD.</a:t>
+            </a:r>
+          </a:p>
+          <a:p>
+            <a:pPr lvl="1"/>
+            <a:r>
+              <a:rPr lang="en-US" sz="2000" dirty="0" smtClean="0"/>
+              <a:t>Prototype + Proof of Concept</a:t>
+            </a:r>
+          </a:p>
+          <a:p>
+            <a:r>
+              <a:rPr lang="en-US" sz="2400" i="1" dirty="0" smtClean="0">
+                <a:solidFill>
+                  <a:srgbClr val="C00000"/>
+                </a:solidFill>
+              </a:rPr>
+              <a:t>Output</a:t>
+            </a:r>
+            <a:r>
+              <a:rPr lang="en-US" sz="2400" dirty="0" smtClean="0"/>
+              <a:t>:</a:t>
+            </a:r>
+          </a:p>
+          <a:p>
+            <a:pPr lvl="1"/>
+            <a:r>
+              <a:rPr lang="en-US" sz="2000" dirty="0" smtClean="0"/>
+              <a:t>Source code </a:t>
+            </a:r>
+            <a:r>
+              <a:rPr lang="en-US" sz="2000" dirty="0" smtClean="0">
+                <a:sym typeface="Wingdings" pitchFamily="2" charset="2"/>
+              </a:rPr>
+              <a:t></a:t>
+            </a:r>
+            <a:r>
+              <a:rPr lang="en-US" sz="2000" dirty="0" smtClean="0"/>
+              <a:t> Problem solved.</a:t>
+            </a:r>
+          </a:p>
+          <a:p>
+            <a:r>
+              <a:rPr lang="en-US" sz="2400" b="1" i="1" dirty="0" smtClean="0">
+                <a:solidFill>
+                  <a:srgbClr val="C00000"/>
+                </a:solidFill>
+              </a:rPr>
+              <a:t>Issue: Which tools? I haven't used these tools.</a:t>
+            </a:r>
+          </a:p>
+        </p:txBody>
+      </p:sp>
+      <p:pic>
+        <p:nvPicPr>
+          <p:cNvPr id="3074" name="Picture 2" descr="https://images.squarespace-cdn.com/content/v1/583ed05c59cc68a8c3e45c0f/1574085452103-JAY3739FDGTE0ZR90QPX/ke17ZwdGBToddI8pDm48kOggE0Ch6pMGalwtLMqzsSB7gQa3H78H3Y0txjaiv_0fDoOvxcdMmMKkDsyUqMSsMWxHk725yiiHCCLfrh8O1z5QPOohDIaIeljMHgDF5CVlOqpeNLcJ80NK65_fV7S1Ufo5RWkg_J4of0jUNHaDHx6pZKBvpVYzidBWCapg0tuoMuEaB2HPGSYDV-11UTcW2g/question-mark-2405197_1920.jpg?format=1000w"/>
+          <p:cNvPicPr>
+            <a:picLocks noChangeAspect="1" noChangeArrowheads="1"/>
+          </p:cNvPicPr>
+          <p:nvPr/>
+        </p:nvPicPr>
+        <p:blipFill>
+          <a:blip r:embed="rId2" cstate="print"/>
+          <a:srcRect/>
+          <a:stretch>
+            <a:fillRect/>
+          </a:stretch>
+        </p:blipFill>
+        <p:spPr bwMode="auto">
+          <a:xfrm>
+            <a:off x="5334000" y="3200400"/>
+            <a:ext cx="3048000" cy="2033016"/>
+          </a:xfrm>
+          <a:prstGeom prst="rect">
+            <a:avLst/>
+          </a:prstGeom>
+          <a:noFill/>
+        </p:spPr>
+      </p:pic>
+    </p:spTree>
+  </p:cSld>
+  <p:clrMapOvr>
+    <a:masterClrMapping/>
+  </p:clrMapOvr>
+</p:sld>
+</file>
+
+<file path=ppt/slides/slide50.xml><?xml version="1.0" encoding="utf-8"?>
 <p:sld xmlns:a="http://schemas.openxmlformats.org/drawingml/2006/main" xmlns:r="http://schemas.openxmlformats.org/officeDocument/2006/relationships" xmlns:p="http://schemas.openxmlformats.org/presentationml/2006/main">
   <p:cSld>
     <p:spTree>
@@ -11439,7 +12140,7 @@
 </p:sld>
 </file>
 
-<file path=ppt/slides/slide49.xml><?xml version="1.0" encoding="utf-8"?>
+<file path=ppt/slides/slide51.xml><?xml version="1.0" encoding="utf-8"?>
 <p:sld xmlns:a="http://schemas.openxmlformats.org/drawingml/2006/main" xmlns:r="http://schemas.openxmlformats.org/officeDocument/2006/relationships" xmlns:p="http://schemas.openxmlformats.org/presentationml/2006/main">
   <p:cSld>
     <p:spTree>
@@ -11498,13 +12199,7 @@
               <a:rPr lang="en-US" sz="2200" dirty="0" smtClean="0">
                 <a:hlinkClick r:id="rId2"/>
               </a:rPr>
-              <a:t>https://</a:t>
-            </a:r>
-            <a:r>
-              <a:rPr lang="en-US" sz="2200" dirty="0" smtClean="0">
-                <a:hlinkClick r:id="rId2"/>
-              </a:rPr>
-              <a:t>traefik.io/traefik</a:t>
+              <a:t>https://traefik.io/traefik</a:t>
             </a:r>
             <a:endParaRPr lang="en-US" sz="2200" dirty="0" smtClean="0"/>
           </a:p>
@@ -11559,205 +12254,7 @@
 </p:sld>
 </file>
 
-<file path=ppt/slides/slide5.xml><?xml version="1.0" encoding="utf-8"?>
-<p:sld xmlns:a="http://schemas.openxmlformats.org/drawingml/2006/main" xmlns:r="http://schemas.openxmlformats.org/officeDocument/2006/relationships" xmlns:p="http://schemas.openxmlformats.org/presentationml/2006/main">
-  <p:cSld>
-    <p:spTree>
-      <p:nvGrpSpPr>
-        <p:cNvPr id="1" name=""/>
-        <p:cNvGrpSpPr/>
-        <p:nvPr/>
-      </p:nvGrpSpPr>
-      <p:grpSpPr>
-        <a:xfrm>
-          <a:off x="0" y="0"/>
-          <a:ext cx="0" cy="0"/>
-          <a:chOff x="0" y="0"/>
-          <a:chExt cx="0" cy="0"/>
-        </a:xfrm>
-      </p:grpSpPr>
-      <p:sp>
-        <p:nvSpPr>
-          <p:cNvPr id="2" name="Title 1"/>
-          <p:cNvSpPr>
-            <a:spLocks noGrp="1"/>
-          </p:cNvSpPr>
-          <p:nvPr>
-            <p:ph type="title"/>
-          </p:nvPr>
-        </p:nvSpPr>
-        <p:spPr/>
-        <p:txBody>
-          <a:bodyPr/>
-          <a:lstStyle/>
-          <a:p>
-            <a:r>
-              <a:rPr lang="en-US" dirty="0" smtClean="0"/>
-              <a:t>Solving a Problem: The </a:t>
-            </a:r>
-            <a:r>
-              <a:rPr lang="en-US" i="1" dirty="0" smtClean="0">
-                <a:solidFill>
-                  <a:srgbClr val="C00000"/>
-                </a:solidFill>
-              </a:rPr>
-              <a:t>Hard</a:t>
-            </a:r>
-            <a:r>
-              <a:rPr lang="en-US" dirty="0" smtClean="0"/>
-              <a:t> Part</a:t>
-            </a:r>
-            <a:endParaRPr lang="en-US" dirty="0"/>
-          </a:p>
-        </p:txBody>
-      </p:sp>
-      <p:sp>
-        <p:nvSpPr>
-          <p:cNvPr id="3" name="Content Placeholder 2"/>
-          <p:cNvSpPr>
-            <a:spLocks noGrp="1"/>
-          </p:cNvSpPr>
-          <p:nvPr>
-            <p:ph idx="1"/>
-          </p:nvPr>
-        </p:nvSpPr>
-        <p:spPr/>
-        <p:txBody>
-          <a:bodyPr/>
-          <a:lstStyle/>
-          <a:p>
-            <a:r>
-              <a:rPr lang="en-US" sz="2400" i="1" dirty="0" smtClean="0">
-                <a:solidFill>
-                  <a:srgbClr val="C00000"/>
-                </a:solidFill>
-              </a:rPr>
-              <a:t>Input</a:t>
-            </a:r>
-            <a:r>
-              <a:rPr lang="en-US" sz="2400" dirty="0" smtClean="0"/>
-              <a:t>:</a:t>
-            </a:r>
-          </a:p>
-          <a:p>
-            <a:pPr lvl="1"/>
-            <a:r>
-              <a:rPr lang="en-US" sz="2000" dirty="0" smtClean="0"/>
-              <a:t>Story: As sponsors, we want the system to be able to run on 2 web servers so that we can serve as many customers as we want.</a:t>
-            </a:r>
-          </a:p>
-          <a:p>
-            <a:pPr lvl="1"/>
-            <a:r>
-              <a:rPr lang="en-US" sz="2000" dirty="0" smtClean="0"/>
-              <a:t>Developer: Ngo Huy Bien.</a:t>
-            </a:r>
-          </a:p>
-          <a:p>
-            <a:r>
-              <a:rPr lang="en-US" sz="2400" dirty="0" smtClean="0"/>
-              <a:t>Bonus: </a:t>
-            </a:r>
-          </a:p>
-          <a:p>
-            <a:pPr lvl="1"/>
-            <a:r>
-              <a:rPr lang="en-US" sz="2000" dirty="0" smtClean="0"/>
-              <a:t>UI + Architecture.</a:t>
-            </a:r>
-          </a:p>
-          <a:p>
-            <a:pPr lvl="1"/>
-            <a:r>
-              <a:rPr lang="en-US" sz="2000" dirty="0" smtClean="0"/>
-              <a:t>Scenarios, Domain Models + ERD.</a:t>
-            </a:r>
-          </a:p>
-          <a:p>
-            <a:pPr lvl="1"/>
-            <a:r>
-              <a:rPr lang="en-US" sz="2000" dirty="0" smtClean="0"/>
-              <a:t>Prototype + Proof of Concept</a:t>
-            </a:r>
-          </a:p>
-          <a:p>
-            <a:r>
-              <a:rPr lang="en-US" sz="2400" i="1" dirty="0" smtClean="0">
-                <a:solidFill>
-                  <a:srgbClr val="C00000"/>
-                </a:solidFill>
-              </a:rPr>
-              <a:t>Output</a:t>
-            </a:r>
-            <a:r>
-              <a:rPr lang="en-US" sz="2400" dirty="0" smtClean="0"/>
-              <a:t>:</a:t>
-            </a:r>
-          </a:p>
-          <a:p>
-            <a:pPr lvl="1"/>
-            <a:r>
-              <a:rPr lang="en-US" sz="2000" dirty="0" smtClean="0"/>
-              <a:t>Source code </a:t>
-            </a:r>
-            <a:r>
-              <a:rPr lang="en-US" sz="2000" dirty="0" smtClean="0">
-                <a:sym typeface="Wingdings" pitchFamily="2" charset="2"/>
-              </a:rPr>
-              <a:t></a:t>
-            </a:r>
-            <a:r>
-              <a:rPr lang="en-US" sz="2000" dirty="0" smtClean="0"/>
-              <a:t> Problem solved.</a:t>
-            </a:r>
-          </a:p>
-          <a:p>
-            <a:r>
-              <a:rPr lang="en-US" sz="2400" b="1" i="1" dirty="0" smtClean="0">
-                <a:solidFill>
-                  <a:srgbClr val="C00000"/>
-                </a:solidFill>
-              </a:rPr>
-              <a:t>Issue: Which tools? I haven't used these tools.</a:t>
-            </a:r>
-          </a:p>
-        </p:txBody>
-      </p:sp>
-      <p:pic>
-        <p:nvPicPr>
-          <p:cNvPr id="3074" name="Picture 2" descr="https://images.squarespace-cdn.com/content/v1/583ed05c59cc68a8c3e45c0f/1574085452103-JAY3739FDGTE0ZR90QPX/ke17ZwdGBToddI8pDm48kOggE0Ch6pMGalwtLMqzsSB7gQa3H78H3Y0txjaiv_0fDoOvxcdMmMKkDsyUqMSsMWxHk725yiiHCCLfrh8O1z5QPOohDIaIeljMHgDF5CVlOqpeNLcJ80NK65_fV7S1Ufo5RWkg_J4of0jUNHaDHx6pZKBvpVYzidBWCapg0tuoMuEaB2HPGSYDV-11UTcW2g/question-mark-2405197_1920.jpg?format=1000w"/>
-          <p:cNvPicPr>
-            <a:picLocks noChangeAspect="1" noChangeArrowheads="1"/>
-          </p:cNvPicPr>
-          <p:nvPr/>
-        </p:nvPicPr>
-        <p:blipFill>
-          <a:blip r:embed="rId2" cstate="print"/>
-          <a:srcRect/>
-          <a:stretch>
-            <a:fillRect/>
-          </a:stretch>
-        </p:blipFill>
-        <p:spPr bwMode="auto">
-          <a:xfrm>
-            <a:off x="5334000" y="3200400"/>
-            <a:ext cx="3048000" cy="2033016"/>
-          </a:xfrm>
-          <a:prstGeom prst="rect">
-            <a:avLst/>
-          </a:prstGeom>
-          <a:noFill/>
-        </p:spPr>
-      </p:pic>
-    </p:spTree>
-  </p:cSld>
-  <p:clrMapOvr>
-    <a:masterClrMapping/>
-  </p:clrMapOvr>
-</p:sld>
-</file>
-
-<file path=ppt/slides/slide50.xml><?xml version="1.0" encoding="utf-8"?>
+<file path=ppt/slides/slide52.xml><?xml version="1.0" encoding="utf-8"?>
 <p:sld xmlns:a="http://schemas.openxmlformats.org/drawingml/2006/main" xmlns:r="http://schemas.openxmlformats.org/officeDocument/2006/relationships" xmlns:p="http://schemas.openxmlformats.org/presentationml/2006/main">
   <p:cSld>
     <p:spTree>

--- a/Microservices/07.2. Load Balancing.pptx
+++ b/Microservices/07.2. Load Balancing.pptx
@@ -11626,23 +11626,11 @@
           <a:p>
             <a:r>
               <a:rPr lang="en-US" sz="2400" b="1" dirty="0" smtClean="0"/>
-              <a:t>Set </a:t>
-            </a:r>
-            <a:r>
-              <a:rPr lang="en-US" sz="2400" b="1" smtClean="0"/>
-              <a:t>an </a:t>
-            </a:r>
-            <a:r>
-              <a:rPr lang="en-US" sz="2400" b="1" smtClean="0"/>
-              <a:t>SLO (Service Level Objective):</a:t>
-            </a:r>
-            <a:r>
-              <a:rPr lang="en-US" sz="2400" smtClean="0"/>
-              <a:t> </a:t>
+              <a:t>Set an SLO (Service Level Objective):</a:t>
             </a:r>
             <a:r>
               <a:rPr lang="en-US" sz="2400" dirty="0" smtClean="0"/>
-              <a:t>"99</a:t>
+              <a:t> "99</a:t>
             </a:r>
             <a:r>
               <a:rPr lang="en-US" sz="2400" dirty="0" smtClean="0"/>

--- a/Microservices/07.2. Load Balancing.pptx
+++ b/Microservices/07.2. Load Balancing.pptx
@@ -5,7 +5,7 @@
     <p:sldMasterId id="2147483708" r:id="rId1"/>
   </p:sldMasterIdLst>
   <p:notesMasterIdLst>
-    <p:notesMasterId r:id="rId54"/>
+    <p:notesMasterId r:id="rId56"/>
   </p:notesMasterIdLst>
   <p:sldIdLst>
     <p:sldId id="670" r:id="rId2"/>
@@ -59,7 +59,9 @@
     <p:sldId id="725" r:id="rId50"/>
     <p:sldId id="726" r:id="rId51"/>
     <p:sldId id="727" r:id="rId52"/>
-    <p:sldId id="516" r:id="rId53"/>
+    <p:sldId id="731" r:id="rId53"/>
+    <p:sldId id="730" r:id="rId54"/>
+    <p:sldId id="516" r:id="rId55"/>
   </p:sldIdLst>
   <p:sldSz cx="9144000" cy="6858000" type="screen4x3"/>
   <p:notesSz cx="6858000" cy="9144000"/>
@@ -11065,13 +11067,8 @@
             </a:r>
             <a:r>
               <a:rPr lang="en-US" sz="2400" dirty="0" smtClean="0"/>
-              <a:t> of being slow (p99 event</a:t>
-            </a:r>
-            <a:r>
-              <a:rPr lang="en-US" sz="2400" dirty="0" smtClean="0"/>
-              <a:t>),</a:t>
-            </a:r>
-            <a:endParaRPr lang="en-US" sz="2400" dirty="0" smtClean="0"/>
+              <a:t> of being slow (p99 event),</a:t>
+            </a:r>
           </a:p>
           <a:p>
             <a:pPr>
@@ -11093,7 +11090,6 @@
               <a:rPr lang="en-US" sz="2400" dirty="0" smtClean="0"/>
               <a:t>,</a:t>
             </a:r>
-            <a:endParaRPr lang="en-US" sz="2400" dirty="0" smtClean="0"/>
           </a:p>
           <a:p>
             <a:r>
@@ -11111,11 +11107,7 @@
             </a:r>
             <a:r>
               <a:rPr lang="en-US" sz="2400" b="1" dirty="0" smtClean="0"/>
-              <a:t>P(at least one slow</a:t>
-            </a:r>
-            <a:r>
-              <a:rPr lang="en-US" sz="2400" b="1" dirty="0" smtClean="0"/>
-              <a:t>) </a:t>
+              <a:t>P(at least one slow) </a:t>
             </a:r>
             <a:r>
               <a:rPr lang="en-US" sz="2400" dirty="0" smtClean="0"/>
@@ -11131,11 +11123,7 @@
             </a:r>
             <a:r>
               <a:rPr lang="en-US" sz="2400" b="1" dirty="0" smtClean="0"/>
-              <a:t>63</a:t>
-            </a:r>
-            <a:r>
-              <a:rPr lang="en-US" sz="2400" b="1" dirty="0" smtClean="0"/>
-              <a:t>%</a:t>
+              <a:t>63%</a:t>
             </a:r>
             <a:r>
               <a:rPr lang="en-US" sz="2400" dirty="0" smtClean="0"/>
@@ -11321,11 +11309,7 @@
             </a:pPr>
             <a:r>
               <a:rPr lang="en-US" sz="2400" dirty="0" smtClean="0"/>
-              <a:t>	P</a:t>
-            </a:r>
-            <a:r>
-              <a:rPr lang="en-US" sz="2400" dirty="0" smtClean="0"/>
-              <a:t>( T ≤ </a:t>
+              <a:t>	P( T ≤ </a:t>
             </a:r>
             <a:r>
               <a:rPr lang="en-US" sz="2400" dirty="0" err="1" smtClean="0"/>
@@ -11453,11 +11437,7 @@
           <a:p>
             <a:r>
               <a:rPr lang="en-US" dirty="0" smtClean="0"/>
-              <a:t>p99 = 10 </a:t>
-            </a:r>
-            <a:r>
-              <a:rPr lang="en-US" dirty="0" smtClean="0"/>
-              <a:t>ms Meaning</a:t>
+              <a:t>p99 = 10 ms Meaning</a:t>
             </a:r>
             <a:endParaRPr lang="en-US" dirty="0"/>
           </a:p>
@@ -11630,88 +11610,51 @@
             </a:r>
             <a:r>
               <a:rPr lang="en-US" sz="2400" dirty="0" smtClean="0"/>
-              <a:t> "99</a:t>
-            </a:r>
-            <a:r>
-              <a:rPr lang="en-US" sz="2400" dirty="0" smtClean="0"/>
-              <a:t>% of requests must complete within 10 </a:t>
+              <a:t> "99% of requests must complete within 10 </a:t>
             </a:r>
             <a:r>
               <a:rPr lang="en-US" sz="2400" dirty="0" err="1" smtClean="0"/>
-              <a:t>ms</a:t>
-            </a:r>
-            <a:r>
-              <a:rPr lang="en-US" sz="2400" dirty="0" err="1" smtClean="0"/>
-              <a:t>.</a:t>
+              <a:t>ms.</a:t>
             </a:r>
             <a:r>
               <a:rPr lang="en-US" sz="2400" dirty="0" smtClean="0"/>
               <a:t>"</a:t>
             </a:r>
-            <a:endParaRPr lang="en-US" sz="2400" dirty="0" smtClean="0"/>
           </a:p>
           <a:p>
             <a:r>
               <a:rPr lang="en-US" sz="2400" b="1" dirty="0" smtClean="0"/>
-              <a:t>Detect </a:t>
-            </a:r>
+              <a:t>Detect regressions:</a:t>
+            </a:r>
+            <a:r>
+              <a:rPr lang="en-US" sz="2400" dirty="0" smtClean="0"/>
+              <a:t> If a new release changes p99 from 10 ms to 25 ms while p50 stays at 3 ms, the release probably introduced a tail-latency problem.</a:t>
+            </a:r>
+          </a:p>
+          <a:p>
             <a:r>
               <a:rPr lang="en-US" sz="2400" b="1" dirty="0" smtClean="0"/>
-              <a:t>regressions:</a:t>
+              <a:t>Create alerts:</a:t>
             </a:r>
             <a:r>
               <a:rPr lang="en-US" sz="2400" dirty="0" smtClean="0"/>
-              <a:t> If a new release changes p99 from 10 ms to 25 ms while p50 stays at 3 ms, the release probably introduced a tail-latency problem</a:t>
+              <a:t> Alert when p99 exceeds, say, 15 ms for a sustained period.</a:t>
+            </a:r>
+          </a:p>
+          <a:p>
+            <a:r>
+              <a:rPr lang="en-US" sz="2400" b="1" dirty="0" smtClean="0"/>
+              <a:t>Compare implementations:</a:t>
             </a:r>
             <a:r>
               <a:rPr lang="en-US" sz="2400" dirty="0" smtClean="0"/>
-              <a:t>.</a:t>
+              <a:t> Version A has p99 = 10 ms and Version B has p99 = 18 ms, so A gives more predictable latency.</a:t>
             </a:r>
           </a:p>
           <a:p>
             <a:r>
               <a:rPr lang="en-US" sz="2400" b="1" dirty="0" smtClean="0"/>
-              <a:t>Create </a:t>
-            </a:r>
-            <a:r>
-              <a:rPr lang="en-US" sz="2400" b="1" dirty="0" smtClean="0"/>
-              <a:t>alerts:</a:t>
-            </a:r>
-            <a:r>
-              <a:rPr lang="en-US" sz="2400" dirty="0" smtClean="0"/>
-              <a:t> Alert when p99 exceeds, say, 15 ms for a sustained </a:t>
-            </a:r>
-            <a:r>
-              <a:rPr lang="en-US" sz="2400" dirty="0" smtClean="0"/>
-              <a:t>period.</a:t>
-            </a:r>
-          </a:p>
-          <a:p>
-            <a:r>
-              <a:rPr lang="en-US" sz="2400" b="1" dirty="0" smtClean="0"/>
-              <a:t>Compare </a:t>
-            </a:r>
-            <a:r>
-              <a:rPr lang="en-US" sz="2400" b="1" dirty="0" smtClean="0"/>
-              <a:t>implementations:</a:t>
-            </a:r>
-            <a:r>
-              <a:rPr lang="en-US" sz="2400" dirty="0" smtClean="0"/>
-              <a:t> Version A has p99 = 10 ms and Version B has p99 = 18 ms, so A gives more predictable </a:t>
-            </a:r>
-            <a:r>
-              <a:rPr lang="en-US" sz="2400" dirty="0" smtClean="0"/>
-              <a:t>latency.</a:t>
-            </a:r>
-          </a:p>
-          <a:p>
-            <a:r>
-              <a:rPr lang="en-US" sz="2400" b="1" dirty="0" smtClean="0"/>
-              <a:t>Test </a:t>
-            </a:r>
-            <a:r>
-              <a:rPr lang="en-US" sz="2400" b="1" dirty="0" smtClean="0"/>
-              <a:t>capacity:</a:t>
+              <a:t>Test capacity:</a:t>
             </a:r>
             <a:r>
               <a:rPr lang="en-US" sz="2400" dirty="0" smtClean="0"/>
@@ -12243,6 +12186,159 @@
 </file>
 
 <file path=ppt/slides/slide52.xml><?xml version="1.0" encoding="utf-8"?>
+<p:sld xmlns:a="http://schemas.openxmlformats.org/drawingml/2006/main" xmlns:r="http://schemas.openxmlformats.org/officeDocument/2006/relationships" xmlns:p="http://schemas.openxmlformats.org/presentationml/2006/main">
+  <p:cSld>
+    <p:spTree>
+      <p:nvGrpSpPr>
+        <p:cNvPr id="1" name=""/>
+        <p:cNvGrpSpPr/>
+        <p:nvPr/>
+      </p:nvGrpSpPr>
+      <p:grpSpPr>
+        <a:xfrm>
+          <a:off x="0" y="0"/>
+          <a:ext cx="0" cy="0"/>
+          <a:chOff x="0" y="0"/>
+          <a:chExt cx="0" cy="0"/>
+        </a:xfrm>
+      </p:grpSpPr>
+      <p:pic>
+        <p:nvPicPr>
+          <p:cNvPr id="4" name="Picture 2" descr="https://lh3.ggpht.com/1IfZLL2QDSjZ0wS7sUhaMlsAOS8BBzdR3wZ1WawgRn7KZAM8nEVZYMOUM-lqQb0ikIzp=w300"/>
+          <p:cNvPicPr>
+            <a:picLocks noChangeAspect="1" noChangeArrowheads="1"/>
+          </p:cNvPicPr>
+          <p:nvPr/>
+        </p:nvPicPr>
+        <p:blipFill>
+          <a:blip r:embed="rId2" cstate="print"/>
+          <a:srcRect/>
+          <a:stretch>
+            <a:fillRect/>
+          </a:stretch>
+        </p:blipFill>
+        <p:spPr bwMode="auto">
+          <a:xfrm>
+            <a:off x="3276600" y="1905000"/>
+            <a:ext cx="2857500" cy="2857500"/>
+          </a:xfrm>
+          <a:prstGeom prst="rect">
+            <a:avLst/>
+          </a:prstGeom>
+          <a:noFill/>
+        </p:spPr>
+      </p:pic>
+    </p:spTree>
+  </p:cSld>
+  <p:clrMapOvr>
+    <a:masterClrMapping/>
+  </p:clrMapOvr>
+</p:sld>
+</file>
+
+<file path=ppt/slides/slide53.xml><?xml version="1.0" encoding="utf-8"?>
+<p:sld xmlns:a="http://schemas.openxmlformats.org/drawingml/2006/main" xmlns:r="http://schemas.openxmlformats.org/officeDocument/2006/relationships" xmlns:p="http://schemas.openxmlformats.org/presentationml/2006/main">
+  <p:cSld>
+    <p:spTree>
+      <p:nvGrpSpPr>
+        <p:cNvPr id="1" name=""/>
+        <p:cNvGrpSpPr/>
+        <p:nvPr/>
+      </p:nvGrpSpPr>
+      <p:grpSpPr>
+        <a:xfrm>
+          <a:off x="0" y="0"/>
+          <a:ext cx="0" cy="0"/>
+          <a:chOff x="0" y="0"/>
+          <a:chExt cx="0" cy="0"/>
+        </a:xfrm>
+      </p:grpSpPr>
+      <p:sp>
+        <p:nvSpPr>
+          <p:cNvPr id="2" name="Title 1"/>
+          <p:cNvSpPr>
+            <a:spLocks noGrp="1"/>
+          </p:cNvSpPr>
+          <p:nvPr>
+            <p:ph type="title"/>
+          </p:nvPr>
+        </p:nvSpPr>
+        <p:spPr/>
+        <p:txBody>
+          <a:bodyPr/>
+          <a:lstStyle/>
+          <a:p>
+            <a:r>
+              <a:rPr lang="en-US" dirty="0" smtClean="0"/>
+              <a:t>Further Reading</a:t>
+            </a:r>
+            <a:endParaRPr lang="en-US" dirty="0"/>
+          </a:p>
+        </p:txBody>
+      </p:sp>
+      <p:sp>
+        <p:nvSpPr>
+          <p:cNvPr id="3" name="Content Placeholder 2"/>
+          <p:cNvSpPr>
+            <a:spLocks noGrp="1"/>
+          </p:cNvSpPr>
+          <p:nvPr>
+            <p:ph idx="1"/>
+          </p:nvPr>
+        </p:nvSpPr>
+        <p:spPr/>
+        <p:txBody>
+          <a:bodyPr/>
+          <a:lstStyle/>
+          <a:p>
+            <a:r>
+              <a:rPr lang="en-US" sz="2400" dirty="0" smtClean="0"/>
+              <a:t>David G. </a:t>
+            </a:r>
+            <a:r>
+              <a:rPr lang="en-US" sz="2400" dirty="0" err="1" smtClean="0"/>
+              <a:t>Thaler</a:t>
+            </a:r>
+            <a:r>
+              <a:rPr lang="en-US" sz="2400" dirty="0" smtClean="0"/>
+              <a:t> and </a:t>
+            </a:r>
+            <a:r>
+              <a:rPr lang="en-US" sz="2400" dirty="0" err="1" smtClean="0"/>
+              <a:t>Chinya</a:t>
+            </a:r>
+            <a:r>
+              <a:rPr lang="en-US" sz="2400" dirty="0" smtClean="0"/>
+              <a:t> V. </a:t>
+            </a:r>
+            <a:r>
+              <a:rPr lang="en-US" sz="2400" dirty="0" err="1" smtClean="0"/>
+              <a:t>Ravishankar</a:t>
+            </a:r>
+            <a:r>
+              <a:rPr lang="en-US" sz="2400" dirty="0" smtClean="0"/>
+              <a:t> (1998). Using Name-Based Mappings to Increase Hit Rates.</a:t>
+            </a:r>
+          </a:p>
+          <a:p>
+            <a:pPr lvl="1"/>
+            <a:r>
+              <a:rPr lang="en-US" sz="2000" dirty="0" smtClean="0"/>
+              <a:t>Load Balancing Algorithms</a:t>
+            </a:r>
+            <a:endParaRPr lang="en-US" sz="2000" dirty="0"/>
+          </a:p>
+        </p:txBody>
+      </p:sp>
+    </p:spTree>
+  </p:cSld>
+  <p:clrMapOvr>
+    <a:masterClrMapping/>
+  </p:clrMapOvr>
+</p:sld>
+</file>
+
+<file path=ppt/slides/slide54.xml><?xml version="1.0" encoding="utf-8"?>
 <p:sld xmlns:a="http://schemas.openxmlformats.org/drawingml/2006/main" xmlns:r="http://schemas.openxmlformats.org/officeDocument/2006/relationships" xmlns:p="http://schemas.openxmlformats.org/presentationml/2006/main">
   <p:cSld>
     <p:spTree>

--- a/Microservices/07.2. Load Balancing.pptx
+++ b/Microservices/07.2. Load Balancing.pptx
@@ -276,7 +276,7 @@
             <a:fld id="{2F0940CE-BE1D-4C40-AF8B-3898A4D1F5EC}" type="datetimeFigureOut">
               <a:rPr lang="en-US" smtClean="0"/>
               <a:pPr/>
-              <a:t>8/8/2026</a:t>
+              <a:t>8/9/2026</a:t>
             </a:fld>
             <a:endParaRPr lang="en-US"/>
           </a:p>
@@ -897,7 +897,7 @@
               <a:pPr>
                 <a:defRPr/>
               </a:pPr>
-              <a:t>8/8/2026</a:t>
+              <a:t>8/9/2026</a:t>
             </a:fld>
             <a:endParaRPr lang="en-US"/>
           </a:p>
@@ -1089,7 +1089,7 @@
               <a:pPr>
                 <a:defRPr/>
               </a:pPr>
-              <a:t>8/8/2026</a:t>
+              <a:t>8/9/2026</a:t>
             </a:fld>
             <a:endParaRPr lang="en-US"/>
           </a:p>
@@ -1291,7 +1291,7 @@
               <a:pPr>
                 <a:defRPr/>
               </a:pPr>
-              <a:t>8/8/2026</a:t>
+              <a:t>8/9/2026</a:t>
             </a:fld>
             <a:endParaRPr lang="en-US"/>
           </a:p>
@@ -1483,7 +1483,7 @@
               <a:pPr>
                 <a:defRPr/>
               </a:pPr>
-              <a:t>8/8/2026</a:t>
+              <a:t>8/9/2026</a:t>
             </a:fld>
             <a:endParaRPr lang="en-US"/>
           </a:p>
@@ -1751,7 +1751,7 @@
               <a:pPr>
                 <a:defRPr/>
               </a:pPr>
-              <a:t>8/8/2026</a:t>
+              <a:t>8/9/2026</a:t>
             </a:fld>
             <a:endParaRPr lang="en-US"/>
           </a:p>
@@ -2061,7 +2061,7 @@
               <a:pPr>
                 <a:defRPr/>
               </a:pPr>
-              <a:t>8/8/2026</a:t>
+              <a:t>8/9/2026</a:t>
             </a:fld>
             <a:endParaRPr lang="en-US"/>
           </a:p>
@@ -2505,7 +2505,7 @@
               <a:pPr>
                 <a:defRPr/>
               </a:pPr>
-              <a:t>8/8/2026</a:t>
+              <a:t>8/9/2026</a:t>
             </a:fld>
             <a:endParaRPr lang="en-US"/>
           </a:p>
@@ -2645,7 +2645,7 @@
               <a:pPr>
                 <a:defRPr/>
               </a:pPr>
-              <a:t>8/8/2026</a:t>
+              <a:t>8/9/2026</a:t>
             </a:fld>
             <a:endParaRPr lang="en-US"/>
           </a:p>
@@ -2762,7 +2762,7 @@
               <a:pPr>
                 <a:defRPr/>
               </a:pPr>
-              <a:t>8/8/2026</a:t>
+              <a:t>8/9/2026</a:t>
             </a:fld>
             <a:endParaRPr lang="en-US"/>
           </a:p>
@@ -3061,7 +3061,7 @@
               <a:pPr>
                 <a:defRPr/>
               </a:pPr>
-              <a:t>8/8/2026</a:t>
+              <a:t>8/9/2026</a:t>
             </a:fld>
             <a:endParaRPr lang="en-US"/>
           </a:p>
@@ -3339,7 +3339,7 @@
               <a:pPr>
                 <a:defRPr/>
               </a:pPr>
-              <a:t>8/8/2026</a:t>
+              <a:t>8/9/2026</a:t>
             </a:fld>
             <a:endParaRPr lang="en-US"/>
           </a:p>
@@ -3587,7 +3587,7 @@
               <a:pPr>
                 <a:defRPr/>
               </a:pPr>
-              <a:t>8/8/2026</a:t>
+              <a:t>8/9/2026</a:t>
             </a:fld>
             <a:endParaRPr lang="en-US"/>
           </a:p>
@@ -8499,49 +8499,16 @@
             </a:pPr>
             <a:r>
               <a:rPr lang="en-US" sz="2400" dirty="0" smtClean="0"/>
-              <a:t>Application Databases Management</a:t>
-            </a:r>
-          </a:p>
-          <a:p>
-            <a:pPr marL="571500" indent="-571500">
-              <a:buFont typeface="+mj-lt"/>
-              <a:buAutoNum type="romanUcPeriod"/>
-            </a:pPr>
-            <a:endParaRPr lang="en-US" sz="2400" dirty="0" smtClean="0"/>
-          </a:p>
-          <a:p>
-            <a:pPr marL="571500" indent="-571500">
-              <a:buFont typeface="+mj-lt"/>
-              <a:buAutoNum type="romanUcPeriod"/>
-            </a:pPr>
-            <a:endParaRPr lang="en-US" sz="2400" dirty="0" smtClean="0"/>
-          </a:p>
-          <a:p>
-            <a:pPr marL="571500" indent="-571500">
-              <a:buFont typeface="+mj-lt"/>
-              <a:buAutoNum type="romanUcPeriod"/>
-            </a:pPr>
-            <a:endParaRPr lang="en-US" sz="2400" dirty="0" smtClean="0"/>
-          </a:p>
-          <a:p>
-            <a:pPr marL="571500" indent="-571500">
-              <a:buFont typeface="+mj-lt"/>
-              <a:buAutoNum type="romanUcPeriod"/>
-            </a:pPr>
-            <a:endParaRPr lang="en-US" sz="2400" dirty="0" smtClean="0"/>
-          </a:p>
-          <a:p>
-            <a:pPr marL="571500" indent="-571500">
-              <a:buFont typeface="+mj-lt"/>
-              <a:buAutoNum type="romanUcPeriod"/>
-            </a:pPr>
-            <a:endParaRPr lang="en-US" sz="2400" dirty="0" smtClean="0"/>
-          </a:p>
-          <a:p>
-            <a:pPr marL="571500" indent="-571500">
-              <a:buFont typeface="+mj-lt"/>
-              <a:buAutoNum type="romanUcPeriod"/>
-            </a:pPr>
+              <a:t>Application </a:t>
+            </a:r>
+            <a:r>
+              <a:rPr lang="en-US" sz="2400" smtClean="0"/>
+              <a:t>Databases </a:t>
+            </a:r>
+            <a:r>
+              <a:rPr lang="en-US" sz="2400" smtClean="0"/>
+              <a:t>Management</a:t>
+            </a:r>
             <a:endParaRPr lang="en-US" sz="2400" dirty="0" smtClean="0"/>
           </a:p>
         </p:txBody>
